--- a/presentations/ResearchLens_AI_Sprint3_Update.pptx
+++ b/presentations/ResearchLens_AI_Sprint3_Update.pptx
@@ -9,11 +9,9 @@
     <p:sldId id="257" r:id="rId3"/>
     <p:sldId id="258" r:id="rId4"/>
     <p:sldId id="259" r:id="rId5"/>
-    <p:sldId id="260" r:id="rId6"/>
-    <p:sldId id="261" r:id="rId7"/>
   </p:sldIdLst>
   <p:notesMasterIdLst>
-    <p:notesMasterId r:id="rId8"/>
+    <p:notesMasterId r:id="rId6"/>
   </p:notesMasterIdLst>
   <p:sldSz cx="12191695" cy="6858000"/>
   <p:notesSz cx="6858000" cy="12191695"/>
@@ -507,7 +505,7 @@
           <a:p>
             <a:r>
               <a:rPr lang="en-US" dirty="0"/>
-              <a:t>Sprint 3 update deck, formatted to match the Sprint 1 and Sprint 2 decks. Covers AI paper summaries, relevance analysis, live streaming output, and the new multi-note system.</a:t>
+              <a:t>Sprint 3 update deck (condensed 4-slide version), formatted to match the Sprint 1 and Sprint 2 decks. Covers the four Sprint 3 roadmap items: OpenAI integration, AI-generated paper summaries, relevance analysis, and the new multi-note system - scoped strictly to Sprint 3 of the 5-sprint roadmap.</a:t>
             </a:r>
             <a:endParaRPr lang="en-US" dirty="0"/>
           </a:p>
@@ -595,7 +593,7 @@
           <a:p>
             <a:r>
               <a:rPr lang="en-US" dirty="0"/>
-              <a:t>Four core objectives for Sprint 3: AI-generated summaries, relevance analysis, live token-by-token streaming for both, and the new multi-note system replacing the old single free-text notes field.</a:t>
+              <a:t>Four core objectives for Sprint 3, each mapped 1:1 to a roadmap line item: OpenAI API integration, AI-generated paper summarisation, relevance analysis, and the new multi-note system (user notes). PDF upload, the fifth Sprint 3 roadmap item, is omitted here since it actually shipped early in Sprint 2.</a:t>
             </a:r>
             <a:endParaRPr lang="en-US" dirty="0"/>
           </a:p>
@@ -683,7 +681,7 @@
           <a:p>
             <a:r>
               <a:rPr lang="en-US" dirty="0"/>
-              <a:t>Feature checklist alongside a real screenshot of the per-paper detail page, not a mockup - shows the AI Summary card as rendered by the actual template and stylesheet.</a:t>
+              <a:t>Feature checklist alongside a real screenshot of the per-paper detail page, not a mockup - shows the AI Summary card as rendered by the actual template and stylesheet. Scoped to the four Sprint 3 roadmap items: OpenAI integration, summarisation, relevance analysis, and notes.</a:t>
             </a:r>
             <a:endParaRPr lang="en-US" dirty="0"/>
           </a:p>
@@ -771,7 +769,7 @@
           <a:p>
             <a:r>
               <a:rPr lang="en-US" dirty="0"/>
-              <a:t>Streaming flow: the browser opens a fetch() request, openai_service.py streams tokens back from the OpenAI Responses API through the Flask route to the page in real time, and the final text is only committed to the database once the stream completes.</a:t>
+              <a:t>Key achievements: the structured 300-500 word summary format, two independent AI analyses per paper, the new AI Paper Analysis hub, the multi-note system, and the automatic legacy-notes migration. This closes out all four Sprint 3 roadmap items; Sprint 4 (agentic RAG) is out of scope for this deck.</a:t>
             </a:r>
             <a:endParaRPr lang="en-US" dirty="0"/>
           </a:p>
@@ -795,182 +793,6 @@
             <a:fld id="{F7021451-1387-4CA6-816F-3879F97B5CBC}" type="slidenum">
               <a:rPr lang="en-US"/>
               <a:t>4</a:t>
-            </a:fld>
-            <a:endParaRPr lang="en-US"/>
-          </a:p>
-        </p:txBody>
-      </p:sp>
-    </p:spTree>
-    <p:extLst>
-      <p:ext uri="{BB962C8B-B14F-4D97-AF65-F5344CB8AC3E}">
-        <p14:creationId xmlns:p14="http://schemas.microsoft.com/office/powerpoint/2010/main" val="1024086991"/>
-      </p:ext>
-    </p:extLst>
-  </p:cSld>
-  <p:clrMapOvr>
-    <a:masterClrMapping/>
-  </p:clrMapOvr>
-</p:notes>
-</file>
-
-<file path=ppt/notesSlides/notesSlide5.xml><?xml version="1.0" encoding="utf-8"?>
-<p:notes xmlns:a="http://schemas.openxmlformats.org/drawingml/2006/main" xmlns:r="http://schemas.openxmlformats.org/officeDocument/2006/relationships" xmlns:p="http://schemas.openxmlformats.org/presentationml/2006/main">
-  <p:cSld>
-    <p:spTree>
-      <p:nvGrpSpPr>
-        <p:cNvPr id="1" name=""/>
-        <p:cNvGrpSpPr/>
-        <p:nvPr/>
-      </p:nvGrpSpPr>
-      <p:grpSpPr>
-        <a:xfrm>
-          <a:off x="0" y="0"/>
-          <a:ext cx="0" cy="0"/>
-          <a:chOff x="0" y="0"/>
-          <a:chExt cx="0" cy="0"/>
-        </a:xfrm>
-      </p:grpSpPr>
-      <p:sp>
-        <p:nvSpPr>
-          <p:cNvPr id="2" name="Slide Image Placeholder 1"/>
-          <p:cNvSpPr>
-            <a:spLocks noGrp="1" noRot="1" noChangeAspect="1"/>
-          </p:cNvSpPr>
-          <p:nvPr>
-            <p:ph type="sldImg"/>
-          </p:nvPr>
-        </p:nvSpPr>
-        <p:spPr/>
-      </p:sp>
-      <p:sp>
-        <p:nvSpPr>
-          <p:cNvPr id="3" name="Notes Placeholder 2"/>
-          <p:cNvSpPr>
-            <a:spLocks noGrp="1"/>
-          </p:cNvSpPr>
-          <p:nvPr>
-            <p:ph type="body" idx="1"/>
-          </p:nvPr>
-        </p:nvSpPr>
-        <p:spPr/>
-        <p:txBody>
-          <a:bodyPr/>
-          <a:lstStyle/>
-          <a:p>
-            <a:r>
-              <a:rPr lang="en-US" dirty="0"/>
-              <a:t>Key achievements: the structured 300-500 word summary format, two independent AI analyses per paper, live streaming for both, the new AI Paper Analysis hub, the multi-note system, and the automatic legacy-notes migration.</a:t>
-            </a:r>
-            <a:endParaRPr lang="en-US" dirty="0"/>
-          </a:p>
-        </p:txBody>
-      </p:sp>
-      <p:sp>
-        <p:nvSpPr>
-          <p:cNvPr id="4" name="Slide Number Placeholder 3"/>
-          <p:cNvSpPr>
-            <a:spLocks noGrp="1"/>
-          </p:cNvSpPr>
-          <p:nvPr>
-            <p:ph type="sldNum" sz="quarter" idx="10"/>
-          </p:nvPr>
-        </p:nvSpPr>
-        <p:spPr/>
-        <p:txBody>
-          <a:bodyPr/>
-          <a:lstStyle/>
-          <a:p>
-            <a:fld id="{F7021451-1387-4CA6-816F-3879F97B5CBC}" type="slidenum">
-              <a:rPr lang="en-US"/>
-              <a:t>5</a:t>
-            </a:fld>
-            <a:endParaRPr lang="en-US"/>
-          </a:p>
-        </p:txBody>
-      </p:sp>
-    </p:spTree>
-    <p:extLst>
-      <p:ext uri="{BB962C8B-B14F-4D97-AF65-F5344CB8AC3E}">
-        <p14:creationId xmlns:p14="http://schemas.microsoft.com/office/powerpoint/2010/main" val="1024086991"/>
-      </p:ext>
-    </p:extLst>
-  </p:cSld>
-  <p:clrMapOvr>
-    <a:masterClrMapping/>
-  </p:clrMapOvr>
-</p:notes>
-</file>
-
-<file path=ppt/notesSlides/notesSlide6.xml><?xml version="1.0" encoding="utf-8"?>
-<p:notes xmlns:a="http://schemas.openxmlformats.org/drawingml/2006/main" xmlns:r="http://schemas.openxmlformats.org/officeDocument/2006/relationships" xmlns:p="http://schemas.openxmlformats.org/presentationml/2006/main">
-  <p:cSld>
-    <p:spTree>
-      <p:nvGrpSpPr>
-        <p:cNvPr id="1" name=""/>
-        <p:cNvGrpSpPr/>
-        <p:nvPr/>
-      </p:nvGrpSpPr>
-      <p:grpSpPr>
-        <a:xfrm>
-          <a:off x="0" y="0"/>
-          <a:ext cx="0" cy="0"/>
-          <a:chOff x="0" y="0"/>
-          <a:chExt cx="0" cy="0"/>
-        </a:xfrm>
-      </p:grpSpPr>
-      <p:sp>
-        <p:nvSpPr>
-          <p:cNvPr id="2" name="Slide Image Placeholder 1"/>
-          <p:cNvSpPr>
-            <a:spLocks noGrp="1" noRot="1" noChangeAspect="1"/>
-          </p:cNvSpPr>
-          <p:nvPr>
-            <p:ph type="sldImg"/>
-          </p:nvPr>
-        </p:nvSpPr>
-        <p:spPr/>
-      </p:sp>
-      <p:sp>
-        <p:nvSpPr>
-          <p:cNvPr id="3" name="Notes Placeholder 2"/>
-          <p:cNvSpPr>
-            <a:spLocks noGrp="1"/>
-          </p:cNvSpPr>
-          <p:nvPr>
-            <p:ph type="body" idx="1"/>
-          </p:nvPr>
-        </p:nvSpPr>
-        <p:spPr/>
-        <p:txBody>
-          <a:bodyPr/>
-          <a:lstStyle/>
-          <a:p>
-            <a:r>
-              <a:rPr lang="en-US" dirty="0"/>
-              <a:t>Sprint 3 completed items on the left; Sprint 4 focus on agentic research intelligence (evidence tracking, Ask Your Literature, paper comparison, and a minimal OpenAI Agent) on the right, per the project roadmap document.</a:t>
-            </a:r>
-            <a:endParaRPr lang="en-US" dirty="0"/>
-          </a:p>
-        </p:txBody>
-      </p:sp>
-      <p:sp>
-        <p:nvSpPr>
-          <p:cNvPr id="4" name="Slide Number Placeholder 3"/>
-          <p:cNvSpPr>
-            <a:spLocks noGrp="1"/>
-          </p:cNvSpPr>
-          <p:nvPr>
-            <p:ph type="sldNum" sz="quarter" idx="10"/>
-          </p:nvPr>
-        </p:nvSpPr>
-        <p:spPr/>
-        <p:txBody>
-          <a:bodyPr/>
-          <a:lstStyle/>
-          <a:p>
-            <a:fld id="{F7021451-1387-4CA6-816F-3879F97B5CBC}" type="slidenum">
-              <a:rPr lang="en-US"/>
-              <a:t>6</a:t>
             </a:fld>
             <a:endParaRPr lang="en-US"/>
           </a:p>
@@ -1548,7 +1370,7 @@
                 <a:ea typeface="Calibri" pitchFamily="34" charset="-122"/>
                 <a:cs typeface="Calibri" pitchFamily="34" charset="-120"/>
               </a:rPr>
-              <a:t>AI-powered paper analysis with live streaming, and a multi-note system for saved papers</a:t>
+              <a:t>OpenAI-powered paper summaries, relevance analysis, and a multi-note system for saved papers</a:t>
             </a:r>
             <a:endParaRPr lang="en-US" sz="1550" dirty="0"/>
           </a:p>
@@ -1563,7 +1385,7 @@
         <p:spPr>
           <a:xfrm>
             <a:off x="502920" y="4343400"/>
-            <a:ext cx="1441094" cy="384048"/>
+            <a:ext cx="2033626" cy="384048"/>
           </a:xfrm>
           <a:prstGeom prst="roundRect">
             <a:avLst>
@@ -1590,7 +1412,7 @@
         <p:spPr>
           <a:xfrm>
             <a:off x="502920" y="4343400"/>
-            <a:ext cx="1441094" cy="384048"/>
+            <a:ext cx="2033626" cy="384048"/>
           </a:xfrm>
           <a:prstGeom prst="rect">
             <a:avLst/>
@@ -1614,7 +1436,7 @@
                 <a:ea typeface="Calibri" pitchFamily="34" charset="-122"/>
                 <a:cs typeface="Calibri" pitchFamily="34" charset="-120"/>
               </a:rPr>
-              <a:t>AI Summaries</a:t>
+              <a:t>OpenAI Integration</a:t>
             </a:r>
             <a:endParaRPr lang="en-US" sz="1100" dirty="0"/>
           </a:p>
@@ -1628,8 +1450,8 @@
         </p:nvSpPr>
         <p:spPr>
           <a:xfrm>
-            <a:off x="2126894" y="4343400"/>
-            <a:ext cx="2033626" cy="384048"/>
+            <a:off x="2719426" y="4343400"/>
+            <a:ext cx="1441094" cy="384048"/>
           </a:xfrm>
           <a:prstGeom prst="roundRect">
             <a:avLst>
@@ -1655,8 +1477,8 @@
         </p:nvSpPr>
         <p:spPr>
           <a:xfrm>
-            <a:off x="2126894" y="4343400"/>
-            <a:ext cx="2033626" cy="384048"/>
+            <a:off x="2719426" y="4343400"/>
+            <a:ext cx="1441094" cy="384048"/>
           </a:xfrm>
           <a:prstGeom prst="rect">
             <a:avLst/>
@@ -1680,7 +1502,7 @@
                 <a:ea typeface="Calibri" pitchFamily="34" charset="-122"/>
                 <a:cs typeface="Calibri" pitchFamily="34" charset="-120"/>
               </a:rPr>
-              <a:t>Relevance Analysis</a:t>
+              <a:t>AI Summaries</a:t>
             </a:r>
             <a:endParaRPr lang="en-US" sz="1100" dirty="0"/>
           </a:p>
@@ -1695,7 +1517,7 @@
         <p:spPr>
           <a:xfrm>
             <a:off x="4343400" y="4343400"/>
-            <a:ext cx="1638605" cy="384048"/>
+            <a:ext cx="2033626" cy="384048"/>
           </a:xfrm>
           <a:prstGeom prst="roundRect">
             <a:avLst>
@@ -1722,7 +1544,7 @@
         <p:spPr>
           <a:xfrm>
             <a:off x="4343400" y="4343400"/>
-            <a:ext cx="1638605" cy="384048"/>
+            <a:ext cx="2033626" cy="384048"/>
           </a:xfrm>
           <a:prstGeom prst="rect">
             <a:avLst/>
@@ -1746,7 +1568,7 @@
                 <a:ea typeface="Calibri" pitchFamily="34" charset="-122"/>
                 <a:cs typeface="Calibri" pitchFamily="34" charset="-120"/>
               </a:rPr>
-              <a:t>Live Streaming</a:t>
+              <a:t>Relevance Analysis</a:t>
             </a:r>
             <a:endParaRPr lang="en-US" sz="1100" dirty="0"/>
           </a:p>
@@ -1760,7 +1582,7 @@
         </p:nvSpPr>
         <p:spPr>
           <a:xfrm>
-            <a:off x="6164885" y="4343400"/>
+            <a:off x="6559906" y="4343400"/>
             <a:ext cx="1934870" cy="384048"/>
           </a:xfrm>
           <a:prstGeom prst="roundRect">
@@ -1787,7 +1609,7 @@
         </p:nvSpPr>
         <p:spPr>
           <a:xfrm>
-            <a:off x="6164885" y="4343400"/>
+            <a:off x="6559906" y="4343400"/>
             <a:ext cx="1934870" cy="384048"/>
           </a:xfrm>
           <a:prstGeom prst="rect">
@@ -1984,7 +1806,7 @@
                 <a:ea typeface="Calibri" pitchFamily="34" charset="-122"/>
                 <a:cs typeface="Calibri" pitchFamily="34" charset="-120"/>
               </a:rPr>
-              <a:t>Four workstreams the team focused on this sprint, building directly on the Sprint 2 prototype.</a:t>
+              <a:t>Per the project roadmap's Sprint 3 scope: OpenAI integration, paper summarisation, relevance analysis, and user notes.</a:t>
             </a:r>
             <a:endParaRPr lang="en-US" sz="1350" dirty="0"/>
           </a:p>
@@ -2046,7 +1868,7 @@
       </p:sp>
       <p:pic>
         <p:nvPicPr>
-          <p:cNvPr id="6" name="Image 0" descr="/tmp/claude-0/-home-claude/8aa44312-0fe2-5592-9e58-f7573fdf65a9/scratchpad/pptx_work/icons/brain.png">    </p:cNvPr>
+          <p:cNvPr id="6" name="Image 0" descr="/tmp/claude-0/-home-claude/8aa44312-0fe2-5592-9e58-f7573fdf65a9/scratchpad/pptx_work/icons/layers.png">    </p:cNvPr>
           <p:cNvPicPr>
             <a:picLocks noChangeAspect="1"/>
           </p:cNvPicPr>
@@ -2101,7 +1923,7 @@
                 <a:ea typeface="Cambria" pitchFamily="34" charset="-122"/>
                 <a:cs typeface="Cambria" pitchFamily="34" charset="-120"/>
               </a:rPr>
-              <a:t>AI-Powered Summaries</a:t>
+              <a:t>OpenAI API Integration</a:t>
             </a:r>
             <a:endParaRPr lang="en-US" sz="1650" dirty="0"/>
           </a:p>
@@ -2143,7 +1965,7 @@
                 <a:ea typeface="Calibri" pitchFamily="34" charset="-122"/>
                 <a:cs typeface="Calibri" pitchFamily="34" charset="-120"/>
               </a:rPr>
-              <a:t>A structured, 300-500 word OpenAI-generated summary for any saved paper, drawn from its abstract, extracted PDF text, or open-access full text.</a:t>
+              <a:t>OpenAI wired in through a dedicated service layer (openai_service.py), following the same pattern already used for search and authentication.</a:t>
             </a:r>
             <a:endParaRPr lang="en-US" sz="1200" dirty="0"/>
           </a:p>
@@ -2205,7 +2027,7 @@
       </p:sp>
       <p:pic>
         <p:nvPicPr>
-          <p:cNvPr id="11" name="Image 1" descr="/tmp/claude-0/-home-claude/8aa44312-0fe2-5592-9e58-f7573fdf65a9/scratchpad/pptx_work/icons/target.png">    </p:cNvPr>
+          <p:cNvPr id="11" name="Image 1" descr="/tmp/claude-0/-home-claude/8aa44312-0fe2-5592-9e58-f7573fdf65a9/scratchpad/pptx_work/icons/brain.png">    </p:cNvPr>
           <p:cNvPicPr>
             <a:picLocks noChangeAspect="1"/>
           </p:cNvPicPr>
@@ -2260,7 +2082,7 @@
                 <a:ea typeface="Cambria" pitchFamily="34" charset="-122"/>
                 <a:cs typeface="Cambria" pitchFamily="34" charset="-120"/>
               </a:rPr>
-              <a:t>Relevance Analysis</a:t>
+              <a:t>AI-Powered Summaries</a:t>
             </a:r>
             <a:endParaRPr lang="en-US" sz="1650" dirty="0"/>
           </a:p>
@@ -2302,7 +2124,7 @@
                 <a:ea typeface="Calibri" pitchFamily="34" charset="-122"/>
                 <a:cs typeface="Calibri" pitchFamily="34" charset="-120"/>
               </a:rPr>
-              <a:t>An AI assessment of how well a saved paper answers the project's own research question - not a generic summary, but a project-specific judgement.</a:t>
+              <a:t>A structured, 300-500 word OpenAI-generated summary for any saved paper, drawn from its abstract, extracted PDF text, or open-access full text.</a:t>
             </a:r>
             <a:endParaRPr lang="en-US" sz="1200" dirty="0"/>
           </a:p>
@@ -2364,7 +2186,7 @@
       </p:sp>
       <p:pic>
         <p:nvPicPr>
-          <p:cNvPr id="16" name="Image 2" descr="/tmp/claude-0/-home-claude/8aa44312-0fe2-5592-9e58-f7573fdf65a9/scratchpad/pptx_work/icons/zap.png">    </p:cNvPr>
+          <p:cNvPr id="16" name="Image 2" descr="/tmp/claude-0/-home-claude/8aa44312-0fe2-5592-9e58-f7573fdf65a9/scratchpad/pptx_work/icons/target.png">    </p:cNvPr>
           <p:cNvPicPr>
             <a:picLocks noChangeAspect="1"/>
           </p:cNvPicPr>
@@ -2419,7 +2241,7 @@
                 <a:ea typeface="Cambria" pitchFamily="34" charset="-122"/>
                 <a:cs typeface="Cambria" pitchFamily="34" charset="-120"/>
               </a:rPr>
-              <a:t>Live Streaming Output</a:t>
+              <a:t>Relevance Analysis</a:t>
             </a:r>
             <a:endParaRPr lang="en-US" sz="1650" dirty="0"/>
           </a:p>
@@ -2461,7 +2283,7 @@
                 <a:ea typeface="Calibri" pitchFamily="34" charset="-122"/>
                 <a:cs typeface="Calibri" pitchFamily="34" charset="-120"/>
               </a:rPr>
-              <a:t>Both AI features stream into the page token by token as OpenAI generates them, the same way a ChatGPT answer appears - no click-and-wait.</a:t>
+              <a:t>An AI assessment of how well a saved paper answers the project's own research question - not a generic summary, but a project-specific judgement.</a:t>
             </a:r>
             <a:endParaRPr lang="en-US" sz="1200" dirty="0"/>
           </a:p>
@@ -2698,7 +2520,7 @@
                 <a:ea typeface="Calibri" pitchFamily="34" charset="-122"/>
                 <a:cs typeface="Calibri" pitchFamily="34" charset="-120"/>
               </a:rPr>
-              <a:t>2 / 6</a:t>
+              <a:t>2 / 4</a:t>
             </a:r>
             <a:endParaRPr lang="en-US" sz="900" dirty="0"/>
           </a:p>
@@ -2808,7 +2630,7 @@
                 <a:ea typeface="Calibri" pitchFamily="34" charset="-122"/>
                 <a:cs typeface="Calibri" pitchFamily="34" charset="-120"/>
               </a:rPr>
-              <a:t>Working prototype - screenshots taken directly from the live app.</a:t>
+              <a:t>Working prototype - screenshot taken directly from the running app.</a:t>
             </a:r>
             <a:endParaRPr lang="en-US" sz="1350" dirty="0"/>
           </a:p>
@@ -2934,7 +2756,7 @@
                 <a:ea typeface="Calibri" pitchFamily="34" charset="-122"/>
                 <a:cs typeface="Calibri" pitchFamily="34" charset="-120"/>
               </a:rPr>
-              <a:t>AI Summary: structured 300-500 word summaries, streamed live</a:t>
+              <a:t>AI Summary: a structured, 300-500 word summary for any saved paper</a:t>
             </a:r>
             <a:endParaRPr lang="en-US" sz="1250" dirty="0"/>
           </a:p>
@@ -3060,7 +2882,7 @@
                 <a:ea typeface="Calibri" pitchFamily="34" charset="-122"/>
                 <a:cs typeface="Calibri" pitchFamily="34" charset="-120"/>
               </a:rPr>
-              <a:t>Real streaming via Flask + fetch() - not a click-and-wait spinner</a:t>
+              <a:t>New per-paper detail page: abstract, AI Summary, relevance, notes</a:t>
             </a:r>
             <a:endParaRPr lang="en-US" sz="1250" dirty="0"/>
           </a:p>
@@ -3123,7 +2945,7 @@
                 <a:ea typeface="Calibri" pitchFamily="34" charset="-122"/>
                 <a:cs typeface="Calibri" pitchFamily="34" charset="-120"/>
               </a:rPr>
-              <a:t>New per-paper detail page: abstract, AI Summary, relevance, notes</a:t>
+              <a:t>"AI Paper Analysis" hub page across every saved paper</a:t>
             </a:r>
             <a:endParaRPr lang="en-US" sz="1250" dirty="0"/>
           </a:p>
@@ -3186,7 +3008,7 @@
                 <a:ea typeface="Calibri" pitchFamily="34" charset="-122"/>
                 <a:cs typeface="Calibri" pitchFamily="34" charset="-120"/>
               </a:rPr>
-              <a:t>"AI Paper Analysis" hub page across every saved paper</a:t>
+              <a:t>Multi-note system replacing the old single free-text notes field</a:t>
             </a:r>
             <a:endParaRPr lang="en-US" sz="1250" dirty="0"/>
           </a:p>
@@ -3249,78 +3071,15 @@
                 <a:ea typeface="Calibri" pitchFamily="34" charset="-122"/>
                 <a:cs typeface="Calibri" pitchFamily="34" charset="-120"/>
               </a:rPr>
-              <a:t>Multi-note system replacing the old single free-text notes field</a:t>
+              <a:t>Legacy single-note data automatically migrated, once, with no loss</a:t>
             </a:r>
             <a:endParaRPr lang="en-US" sz="1250" dirty="0"/>
           </a:p>
         </p:txBody>
       </p:sp>
-      <p:pic>
-        <p:nvPicPr>
-          <p:cNvPr id="18" name="Image 7" descr="/tmp/claude-0/-home-claude/8aa44312-0fe2-5592-9e58-f7573fdf65a9/scratchpad/pptx_work/icons/check-green.png">    </p:cNvPr>
-          <p:cNvPicPr>
-            <a:picLocks noChangeAspect="1"/>
-          </p:cNvPicPr>
-          <p:nvPr/>
-        </p:nvPicPr>
-        <p:blipFill>
-          <a:blip r:embed="rId8"/>
-          <a:stretch>
-            <a:fillRect/>
-          </a:stretch>
-        </p:blipFill>
-        <p:spPr>
-          <a:xfrm>
-            <a:off x="502920" y="5550408"/>
-            <a:ext cx="201168" cy="201168"/>
-          </a:xfrm>
-          <a:prstGeom prst="rect">
-            <a:avLst/>
-          </a:prstGeom>
-        </p:spPr>
-      </p:pic>
-      <p:sp>
-        <p:nvSpPr>
-          <p:cNvPr id="19" name="Text 9"/>
-          <p:cNvSpPr txBox="1"/>
-          <p:nvPr/>
-        </p:nvSpPr>
-        <p:spPr>
-          <a:xfrm>
-            <a:off x="813816" y="5477256"/>
-            <a:ext cx="4901184" cy="457200"/>
-          </a:xfrm>
-          <a:prstGeom prst="rect">
-            <a:avLst/>
-          </a:prstGeom>
-          <a:noFill/>
-          <a:ln/>
-        </p:spPr>
-        <p:txBody>
-          <a:bodyPr wrap="square" lIns="0" tIns="0" rIns="0" bIns="0" rtlCol="0" anchor="t"/>
-          <a:lstStyle/>
-          <a:p>
-            <a:pPr indent="0" marL="0">
-              <a:buNone/>
-            </a:pPr>
-            <a:r>
-              <a:rPr lang="en-US" sz="1250" dirty="0">
-                <a:solidFill>
-                  <a:srgbClr val="1E2A3A"/>
-                </a:solidFill>
-                <a:latin typeface="Calibri" pitchFamily="34" charset="0"/>
-                <a:ea typeface="Calibri" pitchFamily="34" charset="-122"/>
-                <a:cs typeface="Calibri" pitchFamily="34" charset="-120"/>
-              </a:rPr>
-              <a:t>Legacy single-note data automatically migrated, once, with no loss</a:t>
-            </a:r>
-            <a:endParaRPr lang="en-US" sz="1250" dirty="0"/>
-          </a:p>
-        </p:txBody>
-      </p:sp>
-      <p:sp>
-        <p:nvSpPr>
-          <p:cNvPr id="20" name="Shape 10"/>
+      <p:sp>
+        <p:nvSpPr>
+          <p:cNvPr id="18" name="Shape 9"/>
           <p:cNvSpPr/>
           <p:nvPr/>
         </p:nvSpPr>
@@ -3354,14 +3113,14 @@
       </p:sp>
       <p:pic>
         <p:nvPicPr>
-          <p:cNvPr id="21" name="Image 8" descr="/tmp/claude-0/-home-claude/8aa44312-0fe2-5592-9e58-f7573fdf65a9/scratchpad/screenshots/paper_detail_crop.png">    </p:cNvPr>
+          <p:cNvPr id="19" name="Image 7" descr="/tmp/claude-0/-home-claude/8aa44312-0fe2-5592-9e58-f7573fdf65a9/scratchpad/screenshots/paper_detail_crop.png">    </p:cNvPr>
           <p:cNvPicPr>
             <a:picLocks noChangeAspect="1"/>
           </p:cNvPicPr>
           <p:nvPr/>
         </p:nvPicPr>
         <p:blipFill>
-          <a:blip r:embed="rId9"/>
+          <a:blip r:embed="rId8"/>
           <a:srcRect l="0" r="0" t="0" b="0"/>
           <a:stretch/>
         </p:blipFill>
@@ -3377,7 +3136,7 @@
       </p:pic>
       <p:sp>
         <p:nvSpPr>
-          <p:cNvPr id="22" name="Text 11"/>
+          <p:cNvPr id="20" name="Text 10"/>
           <p:cNvSpPr txBox="1"/>
           <p:nvPr/>
         </p:nvSpPr>
@@ -3408,7 +3167,7 @@
                 <a:ea typeface="Calibri" pitchFamily="34" charset="-122"/>
                 <a:cs typeface="Calibri" pitchFamily="34" charset="-120"/>
               </a:rPr>
-              <a:t>Live screenshot - AI Summary on a saved paper</a:t>
+              <a:t>Real screenshot - AI Summary on a saved paper</a:t>
             </a:r>
             <a:endParaRPr lang="en-US" sz="1050" dirty="0"/>
           </a:p>
@@ -3416,7 +3175,7 @@
       </p:sp>
       <p:sp>
         <p:nvSpPr>
-          <p:cNvPr id="23" name="Text 12"/>
+          <p:cNvPr id="21" name="Text 11"/>
           <p:cNvSpPr txBox="1"/>
           <p:nvPr/>
         </p:nvSpPr>
@@ -3455,7 +3214,7 @@
       </p:sp>
       <p:sp>
         <p:nvSpPr>
-          <p:cNvPr id="24" name="Text 13"/>
+          <p:cNvPr id="22" name="Text 12"/>
           <p:cNvSpPr txBox="1"/>
           <p:nvPr/>
         </p:nvSpPr>
@@ -3486,7 +3245,7 @@
                 <a:ea typeface="Calibri" pitchFamily="34" charset="-122"/>
                 <a:cs typeface="Calibri" pitchFamily="34" charset="-120"/>
               </a:rPr>
-              <a:t>3 / 6</a:t>
+              <a:t>3 / 4</a:t>
             </a:r>
             <a:endParaRPr lang="en-US" sz="900" dirty="0"/>
           </a:p>
@@ -3557,7 +3316,7 @@
                 <a:ea typeface="Cambria" pitchFamily="34" charset="-122"/>
                 <a:cs typeface="Cambria" pitchFamily="34" charset="-120"/>
               </a:rPr>
-              <a:t>How Live AI Streaming Works</a:t>
+              <a:t>Sprint 3 Key Achievements</a:t>
             </a:r>
             <a:endParaRPr lang="en-US" sz="3000" dirty="0"/>
           </a:p>
@@ -3596,7 +3355,7 @@
                 <a:ea typeface="Calibri" pitchFamily="34" charset="-122"/>
                 <a:cs typeface="Calibri" pitchFamily="34" charset="-120"/>
               </a:rPr>
-              <a:t>One click now streams AI output straight into the page, the same way ChatGPT's own replies appear.</a:t>
+              <a:t>Measurable progress since the Sprint 2 prototype review - Sprint 3 scope, complete.</a:t>
             </a:r>
             <a:endParaRPr lang="en-US" sz="1350" dirty="0"/>
           </a:p>
@@ -3610,21 +3369,340 @@
         </p:nvSpPr>
         <p:spPr>
           <a:xfrm>
-            <a:off x="1187166" y="1965960"/>
-            <a:ext cx="868680" cy="868680"/>
-          </a:xfrm>
-          <a:prstGeom prst="ellipse">
-            <a:avLst/>
+            <a:off x="502920" y="1645920"/>
+            <a:ext cx="3484778" cy="1417320"/>
+          </a:xfrm>
+          <a:prstGeom prst="roundRect">
+            <a:avLst>
+              <a:gd name="adj" fmla="val 5161"/>
+            </a:avLst>
           </a:prstGeom>
           <a:solidFill>
-            <a:srgbClr val="1E3A8A"/>
+            <a:srgbClr val="EEEAFD"/>
           </a:solidFill>
           <a:ln/>
         </p:spPr>
+      </p:sp>
+      <p:sp>
+        <p:nvSpPr>
+          <p:cNvPr id="5" name="Text 3"/>
+          <p:cNvSpPr txBox="1"/>
+          <p:nvPr/>
+        </p:nvSpPr>
+        <p:spPr>
+          <a:xfrm>
+            <a:off x="502920" y="1783080"/>
+            <a:ext cx="3484778" cy="685800"/>
+          </a:xfrm>
+          <a:prstGeom prst="rect">
+            <a:avLst/>
+          </a:prstGeom>
+          <a:noFill/>
+          <a:ln/>
+        </p:spPr>
+        <p:txBody>
+          <a:bodyPr wrap="square" lIns="0" tIns="0" rIns="0" bIns="0" rtlCol="0" anchor="ctr"/>
+          <a:lstStyle/>
+          <a:p>
+            <a:pPr algn="ctr" indent="0" marL="0">
+              <a:buNone/>
+            </a:pPr>
+            <a:r>
+              <a:rPr lang="en-US" sz="3400" b="1" dirty="0">
+                <a:solidFill>
+                  <a:srgbClr val="6D5EF0"/>
+                </a:solidFill>
+                <a:latin typeface="Cambria" pitchFamily="34" charset="0"/>
+                <a:ea typeface="Cambria" pitchFamily="34" charset="-122"/>
+                <a:cs typeface="Cambria" pitchFamily="34" charset="-120"/>
+              </a:rPr>
+              <a:t>300-500</a:t>
+            </a:r>
+            <a:endParaRPr lang="en-US" sz="3400" dirty="0"/>
+          </a:p>
+        </p:txBody>
+      </p:sp>
+      <p:sp>
+        <p:nvSpPr>
+          <p:cNvPr id="6" name="Text 4"/>
+          <p:cNvSpPr txBox="1"/>
+          <p:nvPr/>
+        </p:nvSpPr>
+        <p:spPr>
+          <a:xfrm>
+            <a:off x="731520" y="2487168"/>
+            <a:ext cx="3027578" cy="502920"/>
+          </a:xfrm>
+          <a:prstGeom prst="rect">
+            <a:avLst/>
+          </a:prstGeom>
+          <a:noFill/>
+          <a:ln/>
+        </p:spPr>
+        <p:txBody>
+          <a:bodyPr wrap="square" lIns="0" tIns="0" rIns="0" bIns="0" rtlCol="0" anchor="ctr"/>
+          <a:lstStyle/>
+          <a:p>
+            <a:pPr algn="ctr" indent="0" marL="0">
+              <a:buNone/>
+            </a:pPr>
+            <a:r>
+              <a:rPr lang="en-US" sz="1100" dirty="0">
+                <a:solidFill>
+                  <a:srgbClr val="1E2A3A"/>
+                </a:solidFill>
+                <a:latin typeface="Calibri" pitchFamily="34" charset="0"/>
+                <a:ea typeface="Calibri" pitchFamily="34" charset="-122"/>
+                <a:cs typeface="Calibri" pitchFamily="34" charset="-120"/>
+              </a:rPr>
+              <a:t>Words per structured AI-generated summary</a:t>
+            </a:r>
+            <a:endParaRPr lang="en-US" sz="1100" dirty="0"/>
+          </a:p>
+        </p:txBody>
+      </p:sp>
+      <p:sp>
+        <p:nvSpPr>
+          <p:cNvPr id="7" name="Shape 5"/>
+          <p:cNvSpPr/>
+          <p:nvPr/>
+        </p:nvSpPr>
+        <p:spPr>
+          <a:xfrm>
+            <a:off x="4353458" y="1645920"/>
+            <a:ext cx="3484778" cy="1417320"/>
+          </a:xfrm>
+          <a:prstGeom prst="roundRect">
+            <a:avLst>
+              <a:gd name="adj" fmla="val 5161"/>
+            </a:avLst>
+          </a:prstGeom>
+          <a:solidFill>
+            <a:srgbClr val="ECFDF5"/>
+          </a:solidFill>
+          <a:ln/>
+        </p:spPr>
+      </p:sp>
+      <p:sp>
+        <p:nvSpPr>
+          <p:cNvPr id="8" name="Text 6"/>
+          <p:cNvSpPr txBox="1"/>
+          <p:nvPr/>
+        </p:nvSpPr>
+        <p:spPr>
+          <a:xfrm>
+            <a:off x="4353458" y="1783080"/>
+            <a:ext cx="3484778" cy="685800"/>
+          </a:xfrm>
+          <a:prstGeom prst="rect">
+            <a:avLst/>
+          </a:prstGeom>
+          <a:noFill/>
+          <a:ln/>
+        </p:spPr>
+        <p:txBody>
+          <a:bodyPr wrap="square" lIns="0" tIns="0" rIns="0" bIns="0" rtlCol="0" anchor="ctr"/>
+          <a:lstStyle/>
+          <a:p>
+            <a:pPr algn="ctr" indent="0" marL="0">
+              <a:buNone/>
+            </a:pPr>
+            <a:r>
+              <a:rPr lang="en-US" sz="3400" b="1" dirty="0">
+                <a:solidFill>
+                  <a:srgbClr val="0F8B7E"/>
+                </a:solidFill>
+                <a:latin typeface="Cambria" pitchFamily="34" charset="0"/>
+                <a:ea typeface="Cambria" pitchFamily="34" charset="-122"/>
+                <a:cs typeface="Cambria" pitchFamily="34" charset="-120"/>
+              </a:rPr>
+              <a:t>2</a:t>
+            </a:r>
+            <a:endParaRPr lang="en-US" sz="3400" dirty="0"/>
+          </a:p>
+        </p:txBody>
+      </p:sp>
+      <p:sp>
+        <p:nvSpPr>
+          <p:cNvPr id="9" name="Text 7"/>
+          <p:cNvSpPr txBox="1"/>
+          <p:nvPr/>
+        </p:nvSpPr>
+        <p:spPr>
+          <a:xfrm>
+            <a:off x="4582058" y="2487168"/>
+            <a:ext cx="3027578" cy="502920"/>
+          </a:xfrm>
+          <a:prstGeom prst="rect">
+            <a:avLst/>
+          </a:prstGeom>
+          <a:noFill/>
+          <a:ln/>
+        </p:spPr>
+        <p:txBody>
+          <a:bodyPr wrap="square" lIns="0" tIns="0" rIns="0" bIns="0" rtlCol="0" anchor="ctr"/>
+          <a:lstStyle/>
+          <a:p>
+            <a:pPr algn="ctr" indent="0" marL="0">
+              <a:buNone/>
+            </a:pPr>
+            <a:r>
+              <a:rPr lang="en-US" sz="1100" dirty="0">
+                <a:solidFill>
+                  <a:srgbClr val="1E2A3A"/>
+                </a:solidFill>
+                <a:latin typeface="Calibri" pitchFamily="34" charset="0"/>
+                <a:ea typeface="Calibri" pitchFamily="34" charset="-122"/>
+                <a:cs typeface="Calibri" pitchFamily="34" charset="-120"/>
+              </a:rPr>
+              <a:t>Independent AI analyses per saved paper</a:t>
+            </a:r>
+            <a:endParaRPr lang="en-US" sz="1100" dirty="0"/>
+          </a:p>
+        </p:txBody>
+      </p:sp>
+      <p:sp>
+        <p:nvSpPr>
+          <p:cNvPr id="10" name="Shape 8"/>
+          <p:cNvSpPr/>
+          <p:nvPr/>
+        </p:nvSpPr>
+        <p:spPr>
+          <a:xfrm>
+            <a:off x="8203997" y="1645920"/>
+            <a:ext cx="3484778" cy="1417320"/>
+          </a:xfrm>
+          <a:prstGeom prst="roundRect">
+            <a:avLst>
+              <a:gd name="adj" fmla="val 5161"/>
+            </a:avLst>
+          </a:prstGeom>
+          <a:solidFill>
+            <a:srgbClr val="FEF3E2"/>
+          </a:solidFill>
+          <a:ln/>
+        </p:spPr>
+      </p:sp>
+      <p:sp>
+        <p:nvSpPr>
+          <p:cNvPr id="11" name="Text 9"/>
+          <p:cNvSpPr txBox="1"/>
+          <p:nvPr/>
+        </p:nvSpPr>
+        <p:spPr>
+          <a:xfrm>
+            <a:off x="8203997" y="1783080"/>
+            <a:ext cx="3484778" cy="685800"/>
+          </a:xfrm>
+          <a:prstGeom prst="rect">
+            <a:avLst/>
+          </a:prstGeom>
+          <a:noFill/>
+          <a:ln/>
+        </p:spPr>
+        <p:txBody>
+          <a:bodyPr wrap="square" lIns="0" tIns="0" rIns="0" bIns="0" rtlCol="0" anchor="ctr"/>
+          <a:lstStyle/>
+          <a:p>
+            <a:pPr algn="ctr" indent="0" marL="0">
+              <a:buNone/>
+            </a:pPr>
+            <a:r>
+              <a:rPr lang="en-US" sz="3400" b="1" dirty="0">
+                <a:solidFill>
+                  <a:srgbClr val="C77D14"/>
+                </a:solidFill>
+                <a:latin typeface="Cambria" pitchFamily="34" charset="0"/>
+                <a:ea typeface="Cambria" pitchFamily="34" charset="-122"/>
+                <a:cs typeface="Cambria" pitchFamily="34" charset="-120"/>
+              </a:rPr>
+              <a:t>100%</a:t>
+            </a:r>
+            <a:endParaRPr lang="en-US" sz="3400" dirty="0"/>
+          </a:p>
+        </p:txBody>
+      </p:sp>
+      <p:sp>
+        <p:nvSpPr>
+          <p:cNvPr id="12" name="Text 10"/>
+          <p:cNvSpPr txBox="1"/>
+          <p:nvPr/>
+        </p:nvSpPr>
+        <p:spPr>
+          <a:xfrm>
+            <a:off x="8432597" y="2487168"/>
+            <a:ext cx="3027578" cy="502920"/>
+          </a:xfrm>
+          <a:prstGeom prst="rect">
+            <a:avLst/>
+          </a:prstGeom>
+          <a:noFill/>
+          <a:ln/>
+        </p:spPr>
+        <p:txBody>
+          <a:bodyPr wrap="square" lIns="0" tIns="0" rIns="0" bIns="0" rtlCol="0" anchor="ctr"/>
+          <a:lstStyle/>
+          <a:p>
+            <a:pPr algn="ctr" indent="0" marL="0">
+              <a:buNone/>
+            </a:pPr>
+            <a:r>
+              <a:rPr lang="en-US" sz="1100" dirty="0">
+                <a:solidFill>
+                  <a:srgbClr val="1E2A3A"/>
+                </a:solidFill>
+                <a:latin typeface="Calibri" pitchFamily="34" charset="0"/>
+                <a:ea typeface="Calibri" pitchFamily="34" charset="-122"/>
+                <a:cs typeface="Calibri" pitchFamily="34" charset="-120"/>
+              </a:rPr>
+              <a:t>Of existing note data auto-migrated, zero loss</a:t>
+            </a:r>
+            <a:endParaRPr lang="en-US" sz="1100" dirty="0"/>
+          </a:p>
+        </p:txBody>
+      </p:sp>
+      <p:sp>
+        <p:nvSpPr>
+          <p:cNvPr id="13" name="Text 11"/>
+          <p:cNvSpPr txBox="1"/>
+          <p:nvPr/>
+        </p:nvSpPr>
+        <p:spPr>
+          <a:xfrm>
+            <a:off x="502920" y="3337560"/>
+            <a:ext cx="5486400" cy="320040"/>
+          </a:xfrm>
+          <a:prstGeom prst="rect">
+            <a:avLst/>
+          </a:prstGeom>
+          <a:noFill/>
+          <a:ln/>
+        </p:spPr>
+        <p:txBody>
+          <a:bodyPr wrap="square" lIns="0" tIns="0" rIns="0" bIns="0" rtlCol="0" anchor="ctr"/>
+          <a:lstStyle/>
+          <a:p>
+            <a:pPr indent="0" marL="0">
+              <a:buNone/>
+            </a:pPr>
+            <a:r>
+              <a:rPr lang="en-US" sz="1500" b="1" dirty="0">
+                <a:solidFill>
+                  <a:srgbClr val="0F172A"/>
+                </a:solidFill>
+                <a:latin typeface="Cambria" pitchFamily="34" charset="0"/>
+                <a:ea typeface="Cambria" pitchFamily="34" charset="-122"/>
+                <a:cs typeface="Cambria" pitchFamily="34" charset="-120"/>
+              </a:rPr>
+              <a:t>What shipped</a:t>
+            </a:r>
+            <a:endParaRPr lang="en-US" sz="1500" dirty="0"/>
+          </a:p>
+        </p:txBody>
       </p:sp>
       <p:pic>
         <p:nvPicPr>
-          <p:cNvPr id="5" name="Image 0" descr="/tmp/claude-0/-home-claude/8aa44312-0fe2-5592-9e58-f7573fdf65a9/scratchpad/pptx_work/icons/cpu-white.png">    </p:cNvPr>
+          <p:cNvPr id="14" name="Image 0" descr="/tmp/claude-0/-home-claude/8aa44312-0fe2-5592-9e58-f7573fdf65a9/scratchpad/pptx_work/icons/check-green.png">    </p:cNvPr>
           <p:cNvPicPr>
             <a:picLocks noChangeAspect="1"/>
           </p:cNvPicPr>
@@ -3638,8 +3716,8 @@
         </p:blipFill>
         <p:spPr>
           <a:xfrm>
-            <a:off x="1406622" y="2185416"/>
-            <a:ext cx="429768" cy="429768"/>
+            <a:off x="502920" y="3794760"/>
+            <a:ext cx="201168" cy="201168"/>
           </a:xfrm>
           <a:prstGeom prst="rect">
             <a:avLst/>
@@ -3648,71 +3726,49 @@
       </p:pic>
       <p:sp>
         <p:nvSpPr>
-          <p:cNvPr id="6" name="Shape 3"/>
-          <p:cNvSpPr/>
-          <p:nvPr/>
-        </p:nvSpPr>
-        <p:spPr>
-          <a:xfrm>
-            <a:off x="1744950" y="1856232"/>
-            <a:ext cx="365760" cy="365760"/>
-          </a:xfrm>
-          <a:prstGeom prst="ellipse">
-            <a:avLst/>
-          </a:prstGeom>
-          <a:solidFill>
-            <a:srgbClr val="0F172A"/>
-          </a:solidFill>
-          <a:ln w="25400">
-            <a:solidFill>
-              <a:srgbClr val="FFFFFF"/>
-            </a:solidFill>
-            <a:prstDash val="solid"/>
-          </a:ln>
-        </p:spPr>
-      </p:sp>
-      <p:sp>
-        <p:nvSpPr>
-          <p:cNvPr id="7" name="Text 4"/>
-          <p:cNvSpPr txBox="1"/>
-          <p:nvPr/>
-        </p:nvSpPr>
-        <p:spPr>
-          <a:xfrm>
-            <a:off x="1744950" y="1856232"/>
-            <a:ext cx="365760" cy="365760"/>
-          </a:xfrm>
-          <a:prstGeom prst="rect">
-            <a:avLst/>
-          </a:prstGeom>
-          <a:noFill/>
-          <a:ln/>
-        </p:spPr>
-        <p:txBody>
-          <a:bodyPr wrap="square" lIns="0" tIns="0" rIns="0" bIns="0" rtlCol="0" anchor="ctr"/>
-          <a:lstStyle/>
-          <a:p>
-            <a:pPr algn="ctr" indent="0" marL="0">
-              <a:buNone/>
-            </a:pPr>
-            <a:r>
-              <a:rPr lang="en-US" sz="1200" b="1" dirty="0">
-                <a:solidFill>
-                  <a:srgbClr val="FFFFFF"/>
+          <p:cNvPr id="15" name="Text 12"/>
+          <p:cNvSpPr txBox="1"/>
+          <p:nvPr/>
+        </p:nvSpPr>
+        <p:spPr>
+          <a:xfrm>
+            <a:off x="813816" y="3712464"/>
+            <a:ext cx="5122012" cy="502920"/>
+          </a:xfrm>
+          <a:prstGeom prst="rect">
+            <a:avLst/>
+          </a:prstGeom>
+          <a:noFill/>
+          <a:ln/>
+        </p:spPr>
+        <p:txBody>
+          <a:bodyPr wrap="square" lIns="0" tIns="0" rIns="0" bIns="0" rtlCol="0" anchor="t"/>
+          <a:lstStyle/>
+          <a:p>
+            <a:pPr indent="0" marL="0">
+              <a:lnSpc>
+                <a:spcPct val="105000"/>
+              </a:lnSpc>
+              <a:buNone/>
+            </a:pPr>
+            <a:r>
+              <a:rPr lang="en-US" sz="1150" dirty="0">
+                <a:solidFill>
+                  <a:srgbClr val="1E2A3A"/>
                 </a:solidFill>
                 <a:latin typeface="Calibri" pitchFamily="34" charset="0"/>
                 <a:ea typeface="Calibri" pitchFamily="34" charset="-122"/>
                 <a:cs typeface="Calibri" pitchFamily="34" charset="-120"/>
               </a:rPr>
-              <a:t>1</a:t>
-            </a:r>
-            <a:endParaRPr lang="en-US" sz="1200" dirty="0"/>
+              <a:t>Structured, longer AI Summary format (up from a one-line blurb)</a:t>
+            </a:r>
+            <a:endParaRPr lang="en-US" sz="1150" dirty="0"/>
           </a:p>
         </p:txBody>
       </p:sp>
       <p:pic>
         <p:nvPicPr>
-          <p:cNvPr id="8" name="Image 1" descr="/tmp/claude-0/-home-claude/8aa44312-0fe2-5592-9e58-f7573fdf65a9/scratchpad/pptx_work/icons/arrow-blue.png">    </p:cNvPr>
+          <p:cNvPr id="16" name="Image 1" descr="/tmp/claude-0/-home-claude/8aa44312-0fe2-5592-9e58-f7573fdf65a9/scratchpad/pptx_work/icons/check-green.png">    </p:cNvPr>
           <p:cNvPicPr>
             <a:picLocks noChangeAspect="1"/>
           </p:cNvPicPr>
@@ -3726,8 +3782,8 @@
         </p:blipFill>
         <p:spPr>
           <a:xfrm>
-            <a:off x="2593787" y="2253996"/>
-            <a:ext cx="292608" cy="292608"/>
+            <a:off x="6255868" y="3794760"/>
+            <a:ext cx="201168" cy="201168"/>
           </a:xfrm>
           <a:prstGeom prst="rect">
             <a:avLst/>
@@ -3736,105 +3792,49 @@
       </p:pic>
       <p:sp>
         <p:nvSpPr>
-          <p:cNvPr id="9" name="Text 5"/>
-          <p:cNvSpPr txBox="1"/>
-          <p:nvPr/>
-        </p:nvSpPr>
-        <p:spPr>
-          <a:xfrm>
-            <a:off x="594360" y="3017520"/>
-            <a:ext cx="2054291" cy="320040"/>
-          </a:xfrm>
-          <a:prstGeom prst="rect">
-            <a:avLst/>
-          </a:prstGeom>
-          <a:noFill/>
-          <a:ln/>
-        </p:spPr>
-        <p:txBody>
-          <a:bodyPr wrap="square" lIns="0" tIns="0" rIns="0" bIns="0" rtlCol="0" anchor="ctr"/>
-          <a:lstStyle/>
-          <a:p>
-            <a:pPr algn="ctr" indent="0" marL="0">
-              <a:buNone/>
-            </a:pPr>
-            <a:r>
-              <a:rPr lang="en-US" sz="1300" b="1" dirty="0">
-                <a:solidFill>
-                  <a:srgbClr val="0F172A"/>
+          <p:cNvPr id="17" name="Text 13"/>
+          <p:cNvSpPr txBox="1"/>
+          <p:nvPr/>
+        </p:nvSpPr>
+        <p:spPr>
+          <a:xfrm>
+            <a:off x="6566764" y="3712464"/>
+            <a:ext cx="5122012" cy="502920"/>
+          </a:xfrm>
+          <a:prstGeom prst="rect">
+            <a:avLst/>
+          </a:prstGeom>
+          <a:noFill/>
+          <a:ln/>
+        </p:spPr>
+        <p:txBody>
+          <a:bodyPr wrap="square" lIns="0" tIns="0" rIns="0" bIns="0" rtlCol="0" anchor="t"/>
+          <a:lstStyle/>
+          <a:p>
+            <a:pPr indent="0" marL="0">
+              <a:lnSpc>
+                <a:spcPct val="105000"/>
+              </a:lnSpc>
+              <a:buNone/>
+            </a:pPr>
+            <a:r>
+              <a:rPr lang="en-US" sz="1150" dirty="0">
+                <a:solidFill>
+                  <a:srgbClr val="1E2A3A"/>
                 </a:solidFill>
                 <a:latin typeface="Calibri" pitchFamily="34" charset="0"/>
                 <a:ea typeface="Calibri" pitchFamily="34" charset="-122"/>
                 <a:cs typeface="Calibri" pitchFamily="34" charset="-120"/>
               </a:rPr>
-              <a:t>User Clicks</a:t>
-            </a:r>
-            <a:endParaRPr lang="en-US" sz="1300" dirty="0"/>
-          </a:p>
-        </p:txBody>
-      </p:sp>
-      <p:sp>
-        <p:nvSpPr>
-          <p:cNvPr id="10" name="Text 6"/>
-          <p:cNvSpPr txBox="1"/>
-          <p:nvPr/>
-        </p:nvSpPr>
-        <p:spPr>
-          <a:xfrm>
-            <a:off x="594360" y="3337560"/>
-            <a:ext cx="2054291" cy="320040"/>
-          </a:xfrm>
-          <a:prstGeom prst="rect">
-            <a:avLst/>
-          </a:prstGeom>
-          <a:noFill/>
-          <a:ln/>
-        </p:spPr>
-        <p:txBody>
-          <a:bodyPr wrap="square" lIns="0" tIns="0" rIns="0" bIns="0" rtlCol="0" anchor="ctr"/>
-          <a:lstStyle/>
-          <a:p>
-            <a:pPr algn="ctr" indent="0" marL="0">
-              <a:buNone/>
-            </a:pPr>
-            <a:r>
-              <a:rPr lang="en-US" sz="1050" dirty="0">
-                <a:solidFill>
-                  <a:srgbClr val="6B7280"/>
-                </a:solidFill>
-                <a:latin typeface="Calibri" pitchFamily="34" charset="0"/>
-                <a:ea typeface="Calibri" pitchFamily="34" charset="-122"/>
-                <a:cs typeface="Calibri" pitchFamily="34" charset="-120"/>
-              </a:rPr>
-              <a:t>Generate Summary</a:t>
-            </a:r>
-            <a:endParaRPr lang="en-US" sz="1050" dirty="0"/>
-          </a:p>
-        </p:txBody>
-      </p:sp>
-      <p:sp>
-        <p:nvSpPr>
-          <p:cNvPr id="11" name="Shape 7"/>
-          <p:cNvSpPr/>
-          <p:nvPr/>
-        </p:nvSpPr>
-        <p:spPr>
-          <a:xfrm>
-            <a:off x="3424337" y="1965960"/>
-            <a:ext cx="868680" cy="868680"/>
-          </a:xfrm>
-          <a:prstGeom prst="ellipse">
-            <a:avLst/>
-          </a:prstGeom>
-          <a:solidFill>
-            <a:srgbClr val="1E3A8A"/>
-          </a:solidFill>
-          <a:ln/>
-        </p:spPr>
+              <a:t>Relevance Analysis grounded in each project's own research question</a:t>
+            </a:r>
+            <a:endParaRPr lang="en-US" sz="1150" dirty="0"/>
+          </a:p>
+        </p:txBody>
       </p:sp>
       <p:pic>
         <p:nvPicPr>
-          <p:cNvPr id="12" name="Image 2" descr="/tmp/claude-0/-home-claude/8aa44312-0fe2-5592-9e58-f7573fdf65a9/scratchpad/pptx_work/icons/zap-white.png">    </p:cNvPr>
+          <p:cNvPr id="18" name="Image 2" descr="/tmp/claude-0/-home-claude/8aa44312-0fe2-5592-9e58-f7573fdf65a9/scratchpad/pptx_work/icons/check-green.png">    </p:cNvPr>
           <p:cNvPicPr>
             <a:picLocks noChangeAspect="1"/>
           </p:cNvPicPr>
@@ -3848,8 +3848,8 @@
         </p:blipFill>
         <p:spPr>
           <a:xfrm>
-            <a:off x="3643793" y="2185416"/>
-            <a:ext cx="429768" cy="429768"/>
+            <a:off x="502920" y="4526280"/>
+            <a:ext cx="201168" cy="201168"/>
           </a:xfrm>
           <a:prstGeom prst="rect">
             <a:avLst/>
@@ -3858,71 +3858,49 @@
       </p:pic>
       <p:sp>
         <p:nvSpPr>
-          <p:cNvPr id="13" name="Shape 8"/>
-          <p:cNvSpPr/>
-          <p:nvPr/>
-        </p:nvSpPr>
-        <p:spPr>
-          <a:xfrm>
-            <a:off x="3982121" y="1856232"/>
-            <a:ext cx="365760" cy="365760"/>
-          </a:xfrm>
-          <a:prstGeom prst="ellipse">
-            <a:avLst/>
-          </a:prstGeom>
-          <a:solidFill>
-            <a:srgbClr val="0F172A"/>
-          </a:solidFill>
-          <a:ln w="25400">
-            <a:solidFill>
-              <a:srgbClr val="FFFFFF"/>
-            </a:solidFill>
-            <a:prstDash val="solid"/>
-          </a:ln>
-        </p:spPr>
-      </p:sp>
-      <p:sp>
-        <p:nvSpPr>
-          <p:cNvPr id="14" name="Text 9"/>
-          <p:cNvSpPr txBox="1"/>
-          <p:nvPr/>
-        </p:nvSpPr>
-        <p:spPr>
-          <a:xfrm>
-            <a:off x="3982121" y="1856232"/>
-            <a:ext cx="365760" cy="365760"/>
-          </a:xfrm>
-          <a:prstGeom prst="rect">
-            <a:avLst/>
-          </a:prstGeom>
-          <a:noFill/>
-          <a:ln/>
-        </p:spPr>
-        <p:txBody>
-          <a:bodyPr wrap="square" lIns="0" tIns="0" rIns="0" bIns="0" rtlCol="0" anchor="ctr"/>
-          <a:lstStyle/>
-          <a:p>
-            <a:pPr algn="ctr" indent="0" marL="0">
-              <a:buNone/>
-            </a:pPr>
-            <a:r>
-              <a:rPr lang="en-US" sz="1200" b="1" dirty="0">
-                <a:solidFill>
-                  <a:srgbClr val="FFFFFF"/>
+          <p:cNvPr id="19" name="Text 14"/>
+          <p:cNvSpPr txBox="1"/>
+          <p:nvPr/>
+        </p:nvSpPr>
+        <p:spPr>
+          <a:xfrm>
+            <a:off x="813816" y="4443984"/>
+            <a:ext cx="5122012" cy="502920"/>
+          </a:xfrm>
+          <a:prstGeom prst="rect">
+            <a:avLst/>
+          </a:prstGeom>
+          <a:noFill/>
+          <a:ln/>
+        </p:spPr>
+        <p:txBody>
+          <a:bodyPr wrap="square" lIns="0" tIns="0" rIns="0" bIns="0" rtlCol="0" anchor="t"/>
+          <a:lstStyle/>
+          <a:p>
+            <a:pPr indent="0" marL="0">
+              <a:lnSpc>
+                <a:spcPct val="105000"/>
+              </a:lnSpc>
+              <a:buNone/>
+            </a:pPr>
+            <a:r>
+              <a:rPr lang="en-US" sz="1150" dirty="0">
+                <a:solidFill>
+                  <a:srgbClr val="1E2A3A"/>
                 </a:solidFill>
                 <a:latin typeface="Calibri" pitchFamily="34" charset="0"/>
                 <a:ea typeface="Calibri" pitchFamily="34" charset="-122"/>
                 <a:cs typeface="Calibri" pitchFamily="34" charset="-120"/>
               </a:rPr>
-              <a:t>2</a:t>
-            </a:r>
-            <a:endParaRPr lang="en-US" sz="1200" dirty="0"/>
+              <a:t>New "AI Paper Analysis" hub page across every saved paper</a:t>
+            </a:r>
+            <a:endParaRPr lang="en-US" sz="1150" dirty="0"/>
           </a:p>
         </p:txBody>
       </p:sp>
       <p:pic>
         <p:nvPicPr>
-          <p:cNvPr id="15" name="Image 3" descr="/tmp/claude-0/-home-claude/8aa44312-0fe2-5592-9e58-f7573fdf65a9/scratchpad/pptx_work/icons/arrow-blue.png">    </p:cNvPr>
+          <p:cNvPr id="20" name="Image 3" descr="/tmp/claude-0/-home-claude/8aa44312-0fe2-5592-9e58-f7573fdf65a9/scratchpad/pptx_work/icons/check-green.png">    </p:cNvPr>
           <p:cNvPicPr>
             <a:picLocks noChangeAspect="1"/>
           </p:cNvPicPr>
@@ -3936,8 +3914,8 @@
         </p:blipFill>
         <p:spPr>
           <a:xfrm>
-            <a:off x="4830958" y="2253996"/>
-            <a:ext cx="292608" cy="292608"/>
+            <a:off x="6255868" y="4526280"/>
+            <a:ext cx="201168" cy="201168"/>
           </a:xfrm>
           <a:prstGeom prst="rect">
             <a:avLst/>
@@ -3946,105 +3924,49 @@
       </p:pic>
       <p:sp>
         <p:nvSpPr>
-          <p:cNvPr id="16" name="Text 10"/>
-          <p:cNvSpPr txBox="1"/>
-          <p:nvPr/>
-        </p:nvSpPr>
-        <p:spPr>
-          <a:xfrm>
-            <a:off x="2831531" y="3017520"/>
-            <a:ext cx="2054291" cy="320040"/>
-          </a:xfrm>
-          <a:prstGeom prst="rect">
-            <a:avLst/>
-          </a:prstGeom>
-          <a:noFill/>
-          <a:ln/>
-        </p:spPr>
-        <p:txBody>
-          <a:bodyPr wrap="square" lIns="0" tIns="0" rIns="0" bIns="0" rtlCol="0" anchor="ctr"/>
-          <a:lstStyle/>
-          <a:p>
-            <a:pPr algn="ctr" indent="0" marL="0">
-              <a:buNone/>
-            </a:pPr>
-            <a:r>
-              <a:rPr lang="en-US" sz="1300" b="1" dirty="0">
-                <a:solidFill>
-                  <a:srgbClr val="0F172A"/>
+          <p:cNvPr id="21" name="Text 15"/>
+          <p:cNvSpPr txBox="1"/>
+          <p:nvPr/>
+        </p:nvSpPr>
+        <p:spPr>
+          <a:xfrm>
+            <a:off x="6566764" y="4443984"/>
+            <a:ext cx="5122012" cy="502920"/>
+          </a:xfrm>
+          <a:prstGeom prst="rect">
+            <a:avLst/>
+          </a:prstGeom>
+          <a:noFill/>
+          <a:ln/>
+        </p:spPr>
+        <p:txBody>
+          <a:bodyPr wrap="square" lIns="0" tIns="0" rIns="0" bIns="0" rtlCol="0" anchor="t"/>
+          <a:lstStyle/>
+          <a:p>
+            <a:pPr indent="0" marL="0">
+              <a:lnSpc>
+                <a:spcPct val="105000"/>
+              </a:lnSpc>
+              <a:buNone/>
+            </a:pPr>
+            <a:r>
+              <a:rPr lang="en-US" sz="1150" dirty="0">
+                <a:solidFill>
+                  <a:srgbClr val="1E2A3A"/>
                 </a:solidFill>
                 <a:latin typeface="Calibri" pitchFamily="34" charset="0"/>
                 <a:ea typeface="Calibri" pitchFamily="34" charset="-122"/>
                 <a:cs typeface="Calibri" pitchFamily="34" charset="-120"/>
               </a:rPr>
-              <a:t>OpenAI Responds</a:t>
-            </a:r>
-            <a:endParaRPr lang="en-US" sz="1300" dirty="0"/>
-          </a:p>
-        </p:txBody>
-      </p:sp>
-      <p:sp>
-        <p:nvSpPr>
-          <p:cNvPr id="17" name="Text 11"/>
-          <p:cNvSpPr txBox="1"/>
-          <p:nvPr/>
-        </p:nvSpPr>
-        <p:spPr>
-          <a:xfrm>
-            <a:off x="2831531" y="3337560"/>
-            <a:ext cx="2054291" cy="320040"/>
-          </a:xfrm>
-          <a:prstGeom prst="rect">
-            <a:avLst/>
-          </a:prstGeom>
-          <a:noFill/>
-          <a:ln/>
-        </p:spPr>
-        <p:txBody>
-          <a:bodyPr wrap="square" lIns="0" tIns="0" rIns="0" bIns="0" rtlCol="0" anchor="ctr"/>
-          <a:lstStyle/>
-          <a:p>
-            <a:pPr algn="ctr" indent="0" marL="0">
-              <a:buNone/>
-            </a:pPr>
-            <a:r>
-              <a:rPr lang="en-US" sz="1050" dirty="0">
-                <a:solidFill>
-                  <a:srgbClr val="6B7280"/>
-                </a:solidFill>
-                <a:latin typeface="Calibri" pitchFamily="34" charset="0"/>
-                <a:ea typeface="Calibri" pitchFamily="34" charset="-122"/>
-                <a:cs typeface="Calibri" pitchFamily="34" charset="-120"/>
-              </a:rPr>
-              <a:t>streams tokens</a:t>
-            </a:r>
-            <a:endParaRPr lang="en-US" sz="1050" dirty="0"/>
-          </a:p>
-        </p:txBody>
-      </p:sp>
-      <p:sp>
-        <p:nvSpPr>
-          <p:cNvPr id="18" name="Shape 12"/>
-          <p:cNvSpPr/>
-          <p:nvPr/>
-        </p:nvSpPr>
-        <p:spPr>
-          <a:xfrm>
-            <a:off x="5661508" y="1965960"/>
-            <a:ext cx="868680" cy="868680"/>
-          </a:xfrm>
-          <a:prstGeom prst="ellipse">
-            <a:avLst/>
-          </a:prstGeom>
-          <a:solidFill>
-            <a:srgbClr val="1E3A8A"/>
-          </a:solidFill>
-          <a:ln/>
-        </p:spPr>
+              <a:t>Multi-note system: unlimited titled notes, add / edit / delete</a:t>
+            </a:r>
+            <a:endParaRPr lang="en-US" sz="1150" dirty="0"/>
+          </a:p>
+        </p:txBody>
       </p:sp>
       <p:pic>
         <p:nvPicPr>
-          <p:cNvPr id="19" name="Image 4" descr="/tmp/claude-0/-home-claude/8aa44312-0fe2-5592-9e58-f7573fdf65a9/scratchpad/pptx_work/icons/filetext-white.png">    </p:cNvPr>
+          <p:cNvPr id="22" name="Image 4" descr="/tmp/claude-0/-home-claude/8aa44312-0fe2-5592-9e58-f7573fdf65a9/scratchpad/pptx_work/icons/check-green.png">    </p:cNvPr>
           <p:cNvPicPr>
             <a:picLocks noChangeAspect="1"/>
           </p:cNvPicPr>
@@ -4058,8 +3980,8 @@
         </p:blipFill>
         <p:spPr>
           <a:xfrm>
-            <a:off x="5880964" y="2185416"/>
-            <a:ext cx="429768" cy="429768"/>
+            <a:off x="502920" y="5257800"/>
+            <a:ext cx="201168" cy="201168"/>
           </a:xfrm>
           <a:prstGeom prst="rect">
             <a:avLst/>
@@ -4068,71 +3990,49 @@
       </p:pic>
       <p:sp>
         <p:nvSpPr>
-          <p:cNvPr id="20" name="Shape 13"/>
-          <p:cNvSpPr/>
-          <p:nvPr/>
-        </p:nvSpPr>
-        <p:spPr>
-          <a:xfrm>
-            <a:off x="6219292" y="1856232"/>
-            <a:ext cx="365760" cy="365760"/>
-          </a:xfrm>
-          <a:prstGeom prst="ellipse">
-            <a:avLst/>
-          </a:prstGeom>
-          <a:solidFill>
-            <a:srgbClr val="0F172A"/>
-          </a:solidFill>
-          <a:ln w="25400">
-            <a:solidFill>
-              <a:srgbClr val="FFFFFF"/>
-            </a:solidFill>
-            <a:prstDash val="solid"/>
-          </a:ln>
-        </p:spPr>
-      </p:sp>
-      <p:sp>
-        <p:nvSpPr>
-          <p:cNvPr id="21" name="Text 14"/>
-          <p:cNvSpPr txBox="1"/>
-          <p:nvPr/>
-        </p:nvSpPr>
-        <p:spPr>
-          <a:xfrm>
-            <a:off x="6219292" y="1856232"/>
-            <a:ext cx="365760" cy="365760"/>
-          </a:xfrm>
-          <a:prstGeom prst="rect">
-            <a:avLst/>
-          </a:prstGeom>
-          <a:noFill/>
-          <a:ln/>
-        </p:spPr>
-        <p:txBody>
-          <a:bodyPr wrap="square" lIns="0" tIns="0" rIns="0" bIns="0" rtlCol="0" anchor="ctr"/>
-          <a:lstStyle/>
-          <a:p>
-            <a:pPr algn="ctr" indent="0" marL="0">
-              <a:buNone/>
-            </a:pPr>
-            <a:r>
-              <a:rPr lang="en-US" sz="1200" b="1" dirty="0">
-                <a:solidFill>
-                  <a:srgbClr val="FFFFFF"/>
+          <p:cNvPr id="23" name="Text 16"/>
+          <p:cNvSpPr txBox="1"/>
+          <p:nvPr/>
+        </p:nvSpPr>
+        <p:spPr>
+          <a:xfrm>
+            <a:off x="813816" y="5175504"/>
+            <a:ext cx="5122012" cy="502920"/>
+          </a:xfrm>
+          <a:prstGeom prst="rect">
+            <a:avLst/>
+          </a:prstGeom>
+          <a:noFill/>
+          <a:ln/>
+        </p:spPr>
+        <p:txBody>
+          <a:bodyPr wrap="square" lIns="0" tIns="0" rIns="0" bIns="0" rtlCol="0" anchor="t"/>
+          <a:lstStyle/>
+          <a:p>
+            <a:pPr indent="0" marL="0">
+              <a:lnSpc>
+                <a:spcPct val="105000"/>
+              </a:lnSpc>
+              <a:buNone/>
+            </a:pPr>
+            <a:r>
+              <a:rPr lang="en-US" sz="1150" dirty="0">
+                <a:solidFill>
+                  <a:srgbClr val="1E2A3A"/>
                 </a:solidFill>
                 <a:latin typeface="Calibri" pitchFamily="34" charset="0"/>
                 <a:ea typeface="Calibri" pitchFamily="34" charset="-122"/>
                 <a:cs typeface="Calibri" pitchFamily="34" charset="-120"/>
               </a:rPr>
-              <a:t>3</a:t>
-            </a:r>
-            <a:endParaRPr lang="en-US" sz="1200" dirty="0"/>
+              <a:t>Legacy single-note field migrated to the new system automatically</a:t>
+            </a:r>
+            <a:endParaRPr lang="en-US" sz="1150" dirty="0"/>
           </a:p>
         </p:txBody>
       </p:sp>
       <p:pic>
         <p:nvPicPr>
-          <p:cNvPr id="22" name="Image 5" descr="/tmp/claude-0/-home-claude/8aa44312-0fe2-5592-9e58-f7573fdf65a9/scratchpad/pptx_work/icons/arrow-blue.png">    </p:cNvPr>
+          <p:cNvPr id="24" name="Image 5" descr="/tmp/claude-0/-home-claude/8aa44312-0fe2-5592-9e58-f7573fdf65a9/scratchpad/pptx_work/icons/check-green.png">    </p:cNvPr>
           <p:cNvPicPr>
             <a:picLocks noChangeAspect="1"/>
           </p:cNvPicPr>
@@ -4146,8 +4046,8 @@
         </p:blipFill>
         <p:spPr>
           <a:xfrm>
-            <a:off x="7068129" y="2253996"/>
-            <a:ext cx="292608" cy="292608"/>
+            <a:off x="6255868" y="5257800"/>
+            <a:ext cx="201168" cy="201168"/>
           </a:xfrm>
           <a:prstGeom prst="rect">
             <a:avLst/>
@@ -4156,1141 +4056,13 @@
       </p:pic>
       <p:sp>
         <p:nvSpPr>
-          <p:cNvPr id="23" name="Text 15"/>
-          <p:cNvSpPr txBox="1"/>
-          <p:nvPr/>
-        </p:nvSpPr>
-        <p:spPr>
-          <a:xfrm>
-            <a:off x="5068702" y="3017520"/>
-            <a:ext cx="2054291" cy="320040"/>
-          </a:xfrm>
-          <a:prstGeom prst="rect">
-            <a:avLst/>
-          </a:prstGeom>
-          <a:noFill/>
-          <a:ln/>
-        </p:spPr>
-        <p:txBody>
-          <a:bodyPr wrap="square" lIns="0" tIns="0" rIns="0" bIns="0" rtlCol="0" anchor="ctr"/>
-          <a:lstStyle/>
-          <a:p>
-            <a:pPr algn="ctr" indent="0" marL="0">
-              <a:buNone/>
-            </a:pPr>
-            <a:r>
-              <a:rPr lang="en-US" sz="1300" b="1" dirty="0">
-                <a:solidFill>
-                  <a:srgbClr val="0F172A"/>
-                </a:solidFill>
-                <a:latin typeface="Calibri" pitchFamily="34" charset="0"/>
-                <a:ea typeface="Calibri" pitchFamily="34" charset="-122"/>
-                <a:cs typeface="Calibri" pitchFamily="34" charset="-120"/>
-              </a:rPr>
-              <a:t>Flask Relays</a:t>
-            </a:r>
-            <a:endParaRPr lang="en-US" sz="1300" dirty="0"/>
-          </a:p>
-        </p:txBody>
-      </p:sp>
-      <p:sp>
-        <p:nvSpPr>
-          <p:cNvPr id="24" name="Text 16"/>
-          <p:cNvSpPr txBox="1"/>
-          <p:nvPr/>
-        </p:nvSpPr>
-        <p:spPr>
-          <a:xfrm>
-            <a:off x="5068702" y="3337560"/>
-            <a:ext cx="2054291" cy="320040"/>
-          </a:xfrm>
-          <a:prstGeom prst="rect">
-            <a:avLst/>
-          </a:prstGeom>
-          <a:noFill/>
-          <a:ln/>
-        </p:spPr>
-        <p:txBody>
-          <a:bodyPr wrap="square" lIns="0" tIns="0" rIns="0" bIns="0" rtlCol="0" anchor="ctr"/>
-          <a:lstStyle/>
-          <a:p>
-            <a:pPr algn="ctr" indent="0" marL="0">
-              <a:buNone/>
-            </a:pPr>
-            <a:r>
-              <a:rPr lang="en-US" sz="1050" dirty="0">
-                <a:solidFill>
-                  <a:srgbClr val="6B7280"/>
-                </a:solidFill>
-                <a:latin typeface="Calibri" pitchFamily="34" charset="0"/>
-                <a:ea typeface="Calibri" pitchFamily="34" charset="-122"/>
-                <a:cs typeface="Calibri" pitchFamily="34" charset="-120"/>
-              </a:rPr>
-              <a:t>each chunk, live</a:t>
-            </a:r>
-            <a:endParaRPr lang="en-US" sz="1050" dirty="0"/>
-          </a:p>
-        </p:txBody>
-      </p:sp>
-      <p:sp>
-        <p:nvSpPr>
-          <p:cNvPr id="25" name="Shape 17"/>
-          <p:cNvSpPr/>
-          <p:nvPr/>
-        </p:nvSpPr>
-        <p:spPr>
-          <a:xfrm>
-            <a:off x="7898679" y="1965960"/>
-            <a:ext cx="868680" cy="868680"/>
-          </a:xfrm>
-          <a:prstGeom prst="ellipse">
-            <a:avLst/>
-          </a:prstGeom>
-          <a:solidFill>
-            <a:srgbClr val="1E3A8A"/>
-          </a:solidFill>
-          <a:ln/>
-        </p:spPr>
-      </p:sp>
-      <p:pic>
-        <p:nvPicPr>
-          <p:cNvPr id="26" name="Image 6" descr="/tmp/claude-0/-home-claude/8aa44312-0fe2-5592-9e58-f7573fdf65a9/scratchpad/pptx_work/icons/message-white.png">    </p:cNvPr>
-          <p:cNvPicPr>
-            <a:picLocks noChangeAspect="1"/>
-          </p:cNvPicPr>
-          <p:nvPr/>
-        </p:nvPicPr>
-        <p:blipFill>
-          <a:blip r:embed="rId7"/>
-          <a:stretch>
-            <a:fillRect/>
-          </a:stretch>
-        </p:blipFill>
-        <p:spPr>
-          <a:xfrm>
-            <a:off x="8118135" y="2185416"/>
-            <a:ext cx="429768" cy="429768"/>
-          </a:xfrm>
-          <a:prstGeom prst="rect">
-            <a:avLst/>
-          </a:prstGeom>
-        </p:spPr>
-      </p:pic>
-      <p:sp>
-        <p:nvSpPr>
-          <p:cNvPr id="27" name="Shape 18"/>
-          <p:cNvSpPr/>
-          <p:nvPr/>
-        </p:nvSpPr>
-        <p:spPr>
-          <a:xfrm>
-            <a:off x="8456463" y="1856232"/>
-            <a:ext cx="365760" cy="365760"/>
-          </a:xfrm>
-          <a:prstGeom prst="ellipse">
-            <a:avLst/>
-          </a:prstGeom>
-          <a:solidFill>
-            <a:srgbClr val="0F172A"/>
-          </a:solidFill>
-          <a:ln w="25400">
-            <a:solidFill>
-              <a:srgbClr val="FFFFFF"/>
-            </a:solidFill>
-            <a:prstDash val="solid"/>
-          </a:ln>
-        </p:spPr>
-      </p:sp>
-      <p:sp>
-        <p:nvSpPr>
-          <p:cNvPr id="28" name="Text 19"/>
-          <p:cNvSpPr txBox="1"/>
-          <p:nvPr/>
-        </p:nvSpPr>
-        <p:spPr>
-          <a:xfrm>
-            <a:off x="8456463" y="1856232"/>
-            <a:ext cx="365760" cy="365760"/>
-          </a:xfrm>
-          <a:prstGeom prst="rect">
-            <a:avLst/>
-          </a:prstGeom>
-          <a:noFill/>
-          <a:ln/>
-        </p:spPr>
-        <p:txBody>
-          <a:bodyPr wrap="square" lIns="0" tIns="0" rIns="0" bIns="0" rtlCol="0" anchor="ctr"/>
-          <a:lstStyle/>
-          <a:p>
-            <a:pPr algn="ctr" indent="0" marL="0">
-              <a:buNone/>
-            </a:pPr>
-            <a:r>
-              <a:rPr lang="en-US" sz="1200" b="1" dirty="0">
-                <a:solidFill>
-                  <a:srgbClr val="FFFFFF"/>
-                </a:solidFill>
-                <a:latin typeface="Calibri" pitchFamily="34" charset="0"/>
-                <a:ea typeface="Calibri" pitchFamily="34" charset="-122"/>
-                <a:cs typeface="Calibri" pitchFamily="34" charset="-120"/>
-              </a:rPr>
-              <a:t>4</a:t>
-            </a:r>
-            <a:endParaRPr lang="en-US" sz="1200" dirty="0"/>
-          </a:p>
-        </p:txBody>
-      </p:sp>
-      <p:pic>
-        <p:nvPicPr>
-          <p:cNvPr id="29" name="Image 7" descr="/tmp/claude-0/-home-claude/8aa44312-0fe2-5592-9e58-f7573fdf65a9/scratchpad/pptx_work/icons/arrow-blue.png">    </p:cNvPr>
-          <p:cNvPicPr>
-            <a:picLocks noChangeAspect="1"/>
-          </p:cNvPicPr>
-          <p:nvPr/>
-        </p:nvPicPr>
-        <p:blipFill>
-          <a:blip r:embed="rId8"/>
-          <a:stretch>
-            <a:fillRect/>
-          </a:stretch>
-        </p:blipFill>
-        <p:spPr>
-          <a:xfrm>
-            <a:off x="9305300" y="2253996"/>
-            <a:ext cx="292608" cy="292608"/>
-          </a:xfrm>
-          <a:prstGeom prst="rect">
-            <a:avLst/>
-          </a:prstGeom>
-        </p:spPr>
-      </p:pic>
-      <p:sp>
-        <p:nvSpPr>
-          <p:cNvPr id="30" name="Text 20"/>
-          <p:cNvSpPr txBox="1"/>
-          <p:nvPr/>
-        </p:nvSpPr>
-        <p:spPr>
-          <a:xfrm>
-            <a:off x="7305873" y="3017520"/>
-            <a:ext cx="2054291" cy="320040"/>
-          </a:xfrm>
-          <a:prstGeom prst="rect">
-            <a:avLst/>
-          </a:prstGeom>
-          <a:noFill/>
-          <a:ln/>
-        </p:spPr>
-        <p:txBody>
-          <a:bodyPr wrap="square" lIns="0" tIns="0" rIns="0" bIns="0" rtlCol="0" anchor="ctr"/>
-          <a:lstStyle/>
-          <a:p>
-            <a:pPr algn="ctr" indent="0" marL="0">
-              <a:buNone/>
-            </a:pPr>
-            <a:r>
-              <a:rPr lang="en-US" sz="1300" b="1" dirty="0">
-                <a:solidFill>
-                  <a:srgbClr val="0F172A"/>
-                </a:solidFill>
-                <a:latin typeface="Calibri" pitchFamily="34" charset="0"/>
-                <a:ea typeface="Calibri" pitchFamily="34" charset="-122"/>
-                <a:cs typeface="Calibri" pitchFamily="34" charset="-120"/>
-              </a:rPr>
-              <a:t>Page Renders</a:t>
-            </a:r>
-            <a:endParaRPr lang="en-US" sz="1300" dirty="0"/>
-          </a:p>
-        </p:txBody>
-      </p:sp>
-      <p:sp>
-        <p:nvSpPr>
-          <p:cNvPr id="31" name="Text 21"/>
-          <p:cNvSpPr txBox="1"/>
-          <p:nvPr/>
-        </p:nvSpPr>
-        <p:spPr>
-          <a:xfrm>
-            <a:off x="7305873" y="3337560"/>
-            <a:ext cx="2054291" cy="320040"/>
-          </a:xfrm>
-          <a:prstGeom prst="rect">
-            <a:avLst/>
-          </a:prstGeom>
-          <a:noFill/>
-          <a:ln/>
-        </p:spPr>
-        <p:txBody>
-          <a:bodyPr wrap="square" lIns="0" tIns="0" rIns="0" bIns="0" rtlCol="0" anchor="ctr"/>
-          <a:lstStyle/>
-          <a:p>
-            <a:pPr algn="ctr" indent="0" marL="0">
-              <a:buNone/>
-            </a:pPr>
-            <a:r>
-              <a:rPr lang="en-US" sz="1050" dirty="0">
-                <a:solidFill>
-                  <a:srgbClr val="6B7280"/>
-                </a:solidFill>
-                <a:latin typeface="Calibri" pitchFamily="34" charset="0"/>
-                <a:ea typeface="Calibri" pitchFamily="34" charset="-122"/>
-                <a:cs typeface="Calibri" pitchFamily="34" charset="-120"/>
-              </a:rPr>
-              <a:t>text as it arrives</a:t>
-            </a:r>
-            <a:endParaRPr lang="en-US" sz="1050" dirty="0"/>
-          </a:p>
-        </p:txBody>
-      </p:sp>
-      <p:sp>
-        <p:nvSpPr>
-          <p:cNvPr id="32" name="Shape 22"/>
-          <p:cNvSpPr/>
-          <p:nvPr/>
-        </p:nvSpPr>
-        <p:spPr>
-          <a:xfrm>
-            <a:off x="10135850" y="1965960"/>
-            <a:ext cx="868680" cy="868680"/>
-          </a:xfrm>
-          <a:prstGeom prst="ellipse">
-            <a:avLst/>
-          </a:prstGeom>
-          <a:solidFill>
-            <a:srgbClr val="1E3A8A"/>
-          </a:solidFill>
-          <a:ln/>
-        </p:spPr>
-      </p:sp>
-      <p:pic>
-        <p:nvPicPr>
-          <p:cNvPr id="33" name="Image 8" descr="/tmp/claude-0/-home-claude/8aa44312-0fe2-5592-9e58-f7573fdf65a9/scratchpad/pptx_work/icons/check-white.png">    </p:cNvPr>
-          <p:cNvPicPr>
-            <a:picLocks noChangeAspect="1"/>
-          </p:cNvPicPr>
-          <p:nvPr/>
-        </p:nvPicPr>
-        <p:blipFill>
-          <a:blip r:embed="rId9"/>
-          <a:stretch>
-            <a:fillRect/>
-          </a:stretch>
-        </p:blipFill>
-        <p:spPr>
-          <a:xfrm>
-            <a:off x="10355306" y="2185416"/>
-            <a:ext cx="429768" cy="429768"/>
-          </a:xfrm>
-          <a:prstGeom prst="rect">
-            <a:avLst/>
-          </a:prstGeom>
-        </p:spPr>
-      </p:pic>
-      <p:sp>
-        <p:nvSpPr>
-          <p:cNvPr id="34" name="Shape 23"/>
-          <p:cNvSpPr/>
-          <p:nvPr/>
-        </p:nvSpPr>
-        <p:spPr>
-          <a:xfrm>
-            <a:off x="10693634" y="1856232"/>
-            <a:ext cx="365760" cy="365760"/>
-          </a:xfrm>
-          <a:prstGeom prst="ellipse">
-            <a:avLst/>
-          </a:prstGeom>
-          <a:solidFill>
-            <a:srgbClr val="0F172A"/>
-          </a:solidFill>
-          <a:ln w="25400">
-            <a:solidFill>
-              <a:srgbClr val="FFFFFF"/>
-            </a:solidFill>
-            <a:prstDash val="solid"/>
-          </a:ln>
-        </p:spPr>
-      </p:sp>
-      <p:sp>
-        <p:nvSpPr>
-          <p:cNvPr id="35" name="Text 24"/>
-          <p:cNvSpPr txBox="1"/>
-          <p:nvPr/>
-        </p:nvSpPr>
-        <p:spPr>
-          <a:xfrm>
-            <a:off x="10693634" y="1856232"/>
-            <a:ext cx="365760" cy="365760"/>
-          </a:xfrm>
-          <a:prstGeom prst="rect">
-            <a:avLst/>
-          </a:prstGeom>
-          <a:noFill/>
-          <a:ln/>
-        </p:spPr>
-        <p:txBody>
-          <a:bodyPr wrap="square" lIns="0" tIns="0" rIns="0" bIns="0" rtlCol="0" anchor="ctr"/>
-          <a:lstStyle/>
-          <a:p>
-            <a:pPr algn="ctr" indent="0" marL="0">
-              <a:buNone/>
-            </a:pPr>
-            <a:r>
-              <a:rPr lang="en-US" sz="1200" b="1" dirty="0">
-                <a:solidFill>
-                  <a:srgbClr val="FFFFFF"/>
-                </a:solidFill>
-                <a:latin typeface="Calibri" pitchFamily="34" charset="0"/>
-                <a:ea typeface="Calibri" pitchFamily="34" charset="-122"/>
-                <a:cs typeface="Calibri" pitchFamily="34" charset="-120"/>
-              </a:rPr>
-              <a:t>5</a:t>
-            </a:r>
-            <a:endParaRPr lang="en-US" sz="1200" dirty="0"/>
-          </a:p>
-        </p:txBody>
-      </p:sp>
-      <p:sp>
-        <p:nvSpPr>
-          <p:cNvPr id="36" name="Text 25"/>
-          <p:cNvSpPr txBox="1"/>
-          <p:nvPr/>
-        </p:nvSpPr>
-        <p:spPr>
-          <a:xfrm>
-            <a:off x="9543044" y="3017520"/>
-            <a:ext cx="2054291" cy="320040"/>
-          </a:xfrm>
-          <a:prstGeom prst="rect">
-            <a:avLst/>
-          </a:prstGeom>
-          <a:noFill/>
-          <a:ln/>
-        </p:spPr>
-        <p:txBody>
-          <a:bodyPr wrap="square" lIns="0" tIns="0" rIns="0" bIns="0" rtlCol="0" anchor="ctr"/>
-          <a:lstStyle/>
-          <a:p>
-            <a:pPr algn="ctr" indent="0" marL="0">
-              <a:buNone/>
-            </a:pPr>
-            <a:r>
-              <a:rPr lang="en-US" sz="1300" b="1" dirty="0">
-                <a:solidFill>
-                  <a:srgbClr val="0F172A"/>
-                </a:solidFill>
-                <a:latin typeface="Calibri" pitchFamily="34" charset="0"/>
-                <a:ea typeface="Calibri" pitchFamily="34" charset="-122"/>
-                <a:cs typeface="Calibri" pitchFamily="34" charset="-120"/>
-              </a:rPr>
-              <a:t>Result Saved</a:t>
-            </a:r>
-            <a:endParaRPr lang="en-US" sz="1300" dirty="0"/>
-          </a:p>
-        </p:txBody>
-      </p:sp>
-      <p:sp>
-        <p:nvSpPr>
-          <p:cNvPr id="37" name="Text 26"/>
-          <p:cNvSpPr txBox="1"/>
-          <p:nvPr/>
-        </p:nvSpPr>
-        <p:spPr>
-          <a:xfrm>
-            <a:off x="9543044" y="3337560"/>
-            <a:ext cx="2054291" cy="320040"/>
-          </a:xfrm>
-          <a:prstGeom prst="rect">
-            <a:avLst/>
-          </a:prstGeom>
-          <a:noFill/>
-          <a:ln/>
-        </p:spPr>
-        <p:txBody>
-          <a:bodyPr wrap="square" lIns="0" tIns="0" rIns="0" bIns="0" rtlCol="0" anchor="ctr"/>
-          <a:lstStyle/>
-          <a:p>
-            <a:pPr algn="ctr" indent="0" marL="0">
-              <a:buNone/>
-            </a:pPr>
-            <a:r>
-              <a:rPr lang="en-US" sz="1050" dirty="0">
-                <a:solidFill>
-                  <a:srgbClr val="6B7280"/>
-                </a:solidFill>
-                <a:latin typeface="Calibri" pitchFamily="34" charset="0"/>
-                <a:ea typeface="Calibri" pitchFamily="34" charset="-122"/>
-                <a:cs typeface="Calibri" pitchFamily="34" charset="-120"/>
-              </a:rPr>
-              <a:t>once streaming ends</a:t>
-            </a:r>
-            <a:endParaRPr lang="en-US" sz="1050" dirty="0"/>
-          </a:p>
-        </p:txBody>
-      </p:sp>
-      <p:sp>
-        <p:nvSpPr>
-          <p:cNvPr id="38" name="Shape 27"/>
-          <p:cNvSpPr/>
-          <p:nvPr/>
-        </p:nvSpPr>
-        <p:spPr>
-          <a:xfrm>
-            <a:off x="502920" y="4160520"/>
-            <a:ext cx="11185855" cy="1691640"/>
-          </a:xfrm>
-          <a:prstGeom prst="roundRect">
-            <a:avLst>
-              <a:gd name="adj" fmla="val 4324"/>
-            </a:avLst>
-          </a:prstGeom>
-          <a:solidFill>
-            <a:srgbClr val="EFF6FF"/>
-          </a:solidFill>
-          <a:ln/>
-        </p:spPr>
-      </p:sp>
-      <p:sp>
-        <p:nvSpPr>
-          <p:cNvPr id="39" name="Text 28"/>
-          <p:cNvSpPr txBox="1"/>
-          <p:nvPr/>
-        </p:nvSpPr>
-        <p:spPr>
-          <a:xfrm>
-            <a:off x="822960" y="4361688"/>
-            <a:ext cx="5486400" cy="320040"/>
-          </a:xfrm>
-          <a:prstGeom prst="rect">
-            <a:avLst/>
-          </a:prstGeom>
-          <a:noFill/>
-          <a:ln/>
-        </p:spPr>
-        <p:txBody>
-          <a:bodyPr wrap="square" lIns="0" tIns="0" rIns="0" bIns="0" rtlCol="0" anchor="ctr"/>
-          <a:lstStyle/>
-          <a:p>
-            <a:pPr indent="0" marL="0">
-              <a:buNone/>
-            </a:pPr>
-            <a:r>
-              <a:rPr lang="en-US" sz="1500" b="1" dirty="0">
-                <a:solidFill>
-                  <a:srgbClr val="0F172A"/>
-                </a:solidFill>
-                <a:latin typeface="Cambria" pitchFamily="34" charset="0"/>
-                <a:ea typeface="Cambria" pitchFamily="34" charset="-122"/>
-                <a:cs typeface="Cambria" pitchFamily="34" charset="-120"/>
-              </a:rPr>
-              <a:t>Architecture Note</a:t>
-            </a:r>
-            <a:endParaRPr lang="en-US" sz="1500" dirty="0"/>
-          </a:p>
-        </p:txBody>
-      </p:sp>
-      <p:sp>
-        <p:nvSpPr>
-          <p:cNvPr id="40" name="Text 29"/>
-          <p:cNvSpPr txBox="1"/>
-          <p:nvPr/>
-        </p:nvSpPr>
-        <p:spPr>
-          <a:xfrm>
-            <a:off x="822960" y="4727448"/>
-            <a:ext cx="10545775" cy="1005840"/>
-          </a:xfrm>
-          <a:prstGeom prst="rect">
-            <a:avLst/>
-          </a:prstGeom>
-          <a:noFill/>
-          <a:ln/>
-        </p:spPr>
-        <p:txBody>
-          <a:bodyPr wrap="square" lIns="0" tIns="0" rIns="0" bIns="0" rtlCol="0" anchor="ctr"/>
-          <a:lstStyle/>
-          <a:p>
-            <a:pPr indent="0" marL="0">
-              <a:lnSpc>
-                <a:spcPct val="118000"/>
-              </a:lnSpc>
-              <a:buNone/>
-            </a:pPr>
-            <a:r>
-              <a:rPr lang="en-US" sz="1200" dirty="0">
-                <a:solidFill>
-                  <a:srgbClr val="1E2A3A"/>
-                </a:solidFill>
-                <a:latin typeface="Calibri" pitchFamily="34" charset="0"/>
-                <a:ea typeface="Calibri" pitchFamily="34" charset="-122"/>
-                <a:cs typeface="Calibri" pitchFamily="34" charset="-120"/>
-              </a:rPr>
-              <a:t>AI Summary and Relevance Analysis read a saved paper's abstract, extracted PDF text, or - as a last resort - a linked open-access PDF; the app never fetches a paywalled page. Streamed text is held in the browser and only written to the database once OpenAI finishes the response, so a closed tab or a dropped connection mid-stream never saves a half-written summary.</a:t>
-            </a:r>
-            <a:endParaRPr lang="en-US" sz="1200" dirty="0"/>
-          </a:p>
-        </p:txBody>
-      </p:sp>
-      <p:sp>
-        <p:nvSpPr>
-          <p:cNvPr id="41" name="Text 30"/>
-          <p:cNvSpPr txBox="1"/>
-          <p:nvPr/>
-        </p:nvSpPr>
-        <p:spPr>
-          <a:xfrm>
-            <a:off x="502920" y="6473952"/>
-            <a:ext cx="4572000" cy="274320"/>
-          </a:xfrm>
-          <a:prstGeom prst="rect">
-            <a:avLst/>
-          </a:prstGeom>
-          <a:noFill/>
-          <a:ln/>
-        </p:spPr>
-        <p:txBody>
-          <a:bodyPr wrap="square" lIns="0" tIns="0" rIns="0" bIns="0" rtlCol="0" anchor="ctr"/>
-          <a:lstStyle/>
-          <a:p>
-            <a:pPr indent="0" marL="0">
-              <a:buNone/>
-            </a:pPr>
-            <a:r>
-              <a:rPr lang="en-US" sz="900" dirty="0">
-                <a:solidFill>
-                  <a:srgbClr val="6B7280"/>
-                </a:solidFill>
-                <a:latin typeface="Calibri" pitchFamily="34" charset="0"/>
-                <a:ea typeface="Calibri" pitchFamily="34" charset="-122"/>
-                <a:cs typeface="Calibri" pitchFamily="34" charset="-120"/>
-              </a:rPr>
-              <a:t>ResearchLens AI  ·  Sprint 3 Update</a:t>
-            </a:r>
-            <a:endParaRPr lang="en-US" sz="900" dirty="0"/>
-          </a:p>
-        </p:txBody>
-      </p:sp>
-      <p:sp>
-        <p:nvSpPr>
-          <p:cNvPr id="42" name="Text 31"/>
-          <p:cNvSpPr txBox="1"/>
-          <p:nvPr/>
-        </p:nvSpPr>
-        <p:spPr>
-          <a:xfrm>
-            <a:off x="10774375" y="6473952"/>
-            <a:ext cx="914400" cy="274320"/>
-          </a:xfrm>
-          <a:prstGeom prst="rect">
-            <a:avLst/>
-          </a:prstGeom>
-          <a:noFill/>
-          <a:ln/>
-        </p:spPr>
-        <p:txBody>
-          <a:bodyPr wrap="square" lIns="0" tIns="0" rIns="0" bIns="0" rtlCol="0" anchor="ctr"/>
-          <a:lstStyle/>
-          <a:p>
-            <a:pPr algn="r" indent="0" marL="0">
-              <a:buNone/>
-            </a:pPr>
-            <a:r>
-              <a:rPr lang="en-US" sz="900" dirty="0">
-                <a:solidFill>
-                  <a:srgbClr val="6B7280"/>
-                </a:solidFill>
-                <a:latin typeface="Calibri" pitchFamily="34" charset="0"/>
-                <a:ea typeface="Calibri" pitchFamily="34" charset="-122"/>
-                <a:cs typeface="Calibri" pitchFamily="34" charset="-120"/>
-              </a:rPr>
-              <a:t>4 / 6</a:t>
-            </a:r>
-            <a:endParaRPr lang="en-US" sz="900" dirty="0"/>
-          </a:p>
-        </p:txBody>
-      </p:sp>
-    </p:spTree>
-  </p:cSld>
-  <p:clrMapOvr>
-    <a:masterClrMapping/>
-  </p:clrMapOvr>
-</p:sld>
-</file>
-
-<file path=ppt/slides/slide5.xml><?xml version="1.0" encoding="utf-8"?>
-<p:sld xmlns:a="http://schemas.openxmlformats.org/drawingml/2006/main" xmlns:r="http://schemas.openxmlformats.org/officeDocument/2006/relationships" xmlns:p="http://schemas.openxmlformats.org/presentationml/2006/main">
-  <p:cSld name="Slide 5">
-    <p:bg>
-      <p:bgPr>
-        <a:solidFill>
-          <a:srgbClr val="FFFFFF"/>
-        </a:solidFill>
-      </p:bgPr>
-    </p:bg>
-    <p:spTree>
-      <p:nvGrpSpPr>
-        <p:cNvPr id="1" name=""/>
-        <p:cNvGrpSpPr/>
-        <p:nvPr/>
-      </p:nvGrpSpPr>
-      <p:grpSpPr>
-        <a:xfrm>
-          <a:off x="0" y="0"/>
-          <a:ext cx="0" cy="0"/>
-          <a:chOff x="0" y="0"/>
-          <a:chExt cx="0" cy="0"/>
-        </a:xfrm>
-      </p:grpSpPr>
-      <p:sp>
-        <p:nvSpPr>
-          <p:cNvPr id="2" name="Text 0"/>
-          <p:cNvSpPr txBox="1"/>
-          <p:nvPr/>
-        </p:nvSpPr>
-        <p:spPr>
-          <a:xfrm>
-            <a:off x="502920" y="411480"/>
-            <a:ext cx="11185855" cy="548640"/>
-          </a:xfrm>
-          <a:prstGeom prst="rect">
-            <a:avLst/>
-          </a:prstGeom>
-          <a:noFill/>
-          <a:ln/>
-        </p:spPr>
-        <p:txBody>
-          <a:bodyPr wrap="square" lIns="0" tIns="0" rIns="0" bIns="0" rtlCol="0" anchor="ctr"/>
-          <a:lstStyle/>
-          <a:p>
-            <a:pPr indent="0" marL="0">
-              <a:buNone/>
-            </a:pPr>
-            <a:r>
-              <a:rPr lang="en-US" sz="3000" b="1" dirty="0">
-                <a:solidFill>
-                  <a:srgbClr val="0F172A"/>
-                </a:solidFill>
-                <a:latin typeface="Cambria" pitchFamily="34" charset="0"/>
-                <a:ea typeface="Cambria" pitchFamily="34" charset="-122"/>
-                <a:cs typeface="Cambria" pitchFamily="34" charset="-120"/>
-              </a:rPr>
-              <a:t>Sprint 3 Key Achievements</a:t>
-            </a:r>
-            <a:endParaRPr lang="en-US" sz="3000" dirty="0"/>
-          </a:p>
-        </p:txBody>
-      </p:sp>
-      <p:sp>
-        <p:nvSpPr>
-          <p:cNvPr id="3" name="Text 1"/>
-          <p:cNvSpPr txBox="1"/>
-          <p:nvPr/>
-        </p:nvSpPr>
-        <p:spPr>
-          <a:xfrm>
-            <a:off x="502920" y="932688"/>
-            <a:ext cx="11185855" cy="365760"/>
-          </a:xfrm>
-          <a:prstGeom prst="rect">
-            <a:avLst/>
-          </a:prstGeom>
-          <a:noFill/>
-          <a:ln/>
-        </p:spPr>
-        <p:txBody>
-          <a:bodyPr wrap="square" lIns="0" tIns="0" rIns="0" bIns="0" rtlCol="0" anchor="ctr"/>
-          <a:lstStyle/>
-          <a:p>
-            <a:pPr indent="0" marL="0">
-              <a:buNone/>
-            </a:pPr>
-            <a:r>
-              <a:rPr lang="en-US" sz="1350" dirty="0">
-                <a:solidFill>
-                  <a:srgbClr val="6B7280"/>
-                </a:solidFill>
-                <a:latin typeface="Calibri" pitchFamily="34" charset="0"/>
-                <a:ea typeface="Calibri" pitchFamily="34" charset="-122"/>
-                <a:cs typeface="Calibri" pitchFamily="34" charset="-120"/>
-              </a:rPr>
-              <a:t>Measurable progress since the Sprint 2 prototype review.</a:t>
-            </a:r>
-            <a:endParaRPr lang="en-US" sz="1350" dirty="0"/>
-          </a:p>
-        </p:txBody>
-      </p:sp>
-      <p:sp>
-        <p:nvSpPr>
-          <p:cNvPr id="4" name="Shape 2"/>
-          <p:cNvSpPr/>
-          <p:nvPr/>
-        </p:nvSpPr>
-        <p:spPr>
-          <a:xfrm>
-            <a:off x="502920" y="1645920"/>
-            <a:ext cx="3484778" cy="1417320"/>
-          </a:xfrm>
-          <a:prstGeom prst="roundRect">
-            <a:avLst>
-              <a:gd name="adj" fmla="val 5161"/>
-            </a:avLst>
-          </a:prstGeom>
-          <a:solidFill>
-            <a:srgbClr val="EEEAFD"/>
-          </a:solidFill>
-          <a:ln/>
-        </p:spPr>
-      </p:sp>
-      <p:sp>
-        <p:nvSpPr>
-          <p:cNvPr id="5" name="Text 3"/>
-          <p:cNvSpPr txBox="1"/>
-          <p:nvPr/>
-        </p:nvSpPr>
-        <p:spPr>
-          <a:xfrm>
-            <a:off x="502920" y="1783080"/>
-            <a:ext cx="3484778" cy="685800"/>
-          </a:xfrm>
-          <a:prstGeom prst="rect">
-            <a:avLst/>
-          </a:prstGeom>
-          <a:noFill/>
-          <a:ln/>
-        </p:spPr>
-        <p:txBody>
-          <a:bodyPr wrap="square" lIns="0" tIns="0" rIns="0" bIns="0" rtlCol="0" anchor="ctr"/>
-          <a:lstStyle/>
-          <a:p>
-            <a:pPr algn="ctr" indent="0" marL="0">
-              <a:buNone/>
-            </a:pPr>
-            <a:r>
-              <a:rPr lang="en-US" sz="3400" b="1" dirty="0">
-                <a:solidFill>
-                  <a:srgbClr val="6D5EF0"/>
-                </a:solidFill>
-                <a:latin typeface="Cambria" pitchFamily="34" charset="0"/>
-                <a:ea typeface="Cambria" pitchFamily="34" charset="-122"/>
-                <a:cs typeface="Cambria" pitchFamily="34" charset="-120"/>
-              </a:rPr>
-              <a:t>300-500</a:t>
-            </a:r>
-            <a:endParaRPr lang="en-US" sz="3400" dirty="0"/>
-          </a:p>
-        </p:txBody>
-      </p:sp>
-      <p:sp>
-        <p:nvSpPr>
-          <p:cNvPr id="6" name="Text 4"/>
-          <p:cNvSpPr txBox="1"/>
-          <p:nvPr/>
-        </p:nvSpPr>
-        <p:spPr>
-          <a:xfrm>
-            <a:off x="731520" y="2487168"/>
-            <a:ext cx="3027578" cy="502920"/>
-          </a:xfrm>
-          <a:prstGeom prst="rect">
-            <a:avLst/>
-          </a:prstGeom>
-          <a:noFill/>
-          <a:ln/>
-        </p:spPr>
-        <p:txBody>
-          <a:bodyPr wrap="square" lIns="0" tIns="0" rIns="0" bIns="0" rtlCol="0" anchor="ctr"/>
-          <a:lstStyle/>
-          <a:p>
-            <a:pPr algn="ctr" indent="0" marL="0">
-              <a:buNone/>
-            </a:pPr>
-            <a:r>
-              <a:rPr lang="en-US" sz="1100" dirty="0">
-                <a:solidFill>
-                  <a:srgbClr val="1E2A3A"/>
-                </a:solidFill>
-                <a:latin typeface="Calibri" pitchFamily="34" charset="0"/>
-                <a:ea typeface="Calibri" pitchFamily="34" charset="-122"/>
-                <a:cs typeface="Calibri" pitchFamily="34" charset="-120"/>
-              </a:rPr>
-              <a:t>Words per structured AI-generated summary</a:t>
-            </a:r>
-            <a:endParaRPr lang="en-US" sz="1100" dirty="0"/>
-          </a:p>
-        </p:txBody>
-      </p:sp>
-      <p:sp>
-        <p:nvSpPr>
-          <p:cNvPr id="7" name="Shape 5"/>
-          <p:cNvSpPr/>
-          <p:nvPr/>
-        </p:nvSpPr>
-        <p:spPr>
-          <a:xfrm>
-            <a:off x="4353458" y="1645920"/>
-            <a:ext cx="3484778" cy="1417320"/>
-          </a:xfrm>
-          <a:prstGeom prst="roundRect">
-            <a:avLst>
-              <a:gd name="adj" fmla="val 5161"/>
-            </a:avLst>
-          </a:prstGeom>
-          <a:solidFill>
-            <a:srgbClr val="ECFDF5"/>
-          </a:solidFill>
-          <a:ln/>
-        </p:spPr>
-      </p:sp>
-      <p:sp>
-        <p:nvSpPr>
-          <p:cNvPr id="8" name="Text 6"/>
-          <p:cNvSpPr txBox="1"/>
-          <p:nvPr/>
-        </p:nvSpPr>
-        <p:spPr>
-          <a:xfrm>
-            <a:off x="4353458" y="1783080"/>
-            <a:ext cx="3484778" cy="685800"/>
-          </a:xfrm>
-          <a:prstGeom prst="rect">
-            <a:avLst/>
-          </a:prstGeom>
-          <a:noFill/>
-          <a:ln/>
-        </p:spPr>
-        <p:txBody>
-          <a:bodyPr wrap="square" lIns="0" tIns="0" rIns="0" bIns="0" rtlCol="0" anchor="ctr"/>
-          <a:lstStyle/>
-          <a:p>
-            <a:pPr algn="ctr" indent="0" marL="0">
-              <a:buNone/>
-            </a:pPr>
-            <a:r>
-              <a:rPr lang="en-US" sz="3400" b="1" dirty="0">
-                <a:solidFill>
-                  <a:srgbClr val="0F8B7E"/>
-                </a:solidFill>
-                <a:latin typeface="Cambria" pitchFamily="34" charset="0"/>
-                <a:ea typeface="Cambria" pitchFamily="34" charset="-122"/>
-                <a:cs typeface="Cambria" pitchFamily="34" charset="-120"/>
-              </a:rPr>
-              <a:t>2</a:t>
-            </a:r>
-            <a:endParaRPr lang="en-US" sz="3400" dirty="0"/>
-          </a:p>
-        </p:txBody>
-      </p:sp>
-      <p:sp>
-        <p:nvSpPr>
-          <p:cNvPr id="9" name="Text 7"/>
-          <p:cNvSpPr txBox="1"/>
-          <p:nvPr/>
-        </p:nvSpPr>
-        <p:spPr>
-          <a:xfrm>
-            <a:off x="4582058" y="2487168"/>
-            <a:ext cx="3027578" cy="502920"/>
-          </a:xfrm>
-          <a:prstGeom prst="rect">
-            <a:avLst/>
-          </a:prstGeom>
-          <a:noFill/>
-          <a:ln/>
-        </p:spPr>
-        <p:txBody>
-          <a:bodyPr wrap="square" lIns="0" tIns="0" rIns="0" bIns="0" rtlCol="0" anchor="ctr"/>
-          <a:lstStyle/>
-          <a:p>
-            <a:pPr algn="ctr" indent="0" marL="0">
-              <a:buNone/>
-            </a:pPr>
-            <a:r>
-              <a:rPr lang="en-US" sz="1100" dirty="0">
-                <a:solidFill>
-                  <a:srgbClr val="1E2A3A"/>
-                </a:solidFill>
-                <a:latin typeface="Calibri" pitchFamily="34" charset="0"/>
-                <a:ea typeface="Calibri" pitchFamily="34" charset="-122"/>
-                <a:cs typeface="Calibri" pitchFamily="34" charset="-120"/>
-              </a:rPr>
-              <a:t>Independent AI analyses per saved paper</a:t>
-            </a:r>
-            <a:endParaRPr lang="en-US" sz="1100" dirty="0"/>
-          </a:p>
-        </p:txBody>
-      </p:sp>
-      <p:sp>
-        <p:nvSpPr>
-          <p:cNvPr id="10" name="Shape 8"/>
-          <p:cNvSpPr/>
-          <p:nvPr/>
-        </p:nvSpPr>
-        <p:spPr>
-          <a:xfrm>
-            <a:off x="8203997" y="1645920"/>
-            <a:ext cx="3484778" cy="1417320"/>
-          </a:xfrm>
-          <a:prstGeom prst="roundRect">
-            <a:avLst>
-              <a:gd name="adj" fmla="val 5161"/>
-            </a:avLst>
-          </a:prstGeom>
-          <a:solidFill>
-            <a:srgbClr val="FEF3E2"/>
-          </a:solidFill>
-          <a:ln/>
-        </p:spPr>
-      </p:sp>
-      <p:sp>
-        <p:nvSpPr>
-          <p:cNvPr id="11" name="Text 9"/>
-          <p:cNvSpPr txBox="1"/>
-          <p:nvPr/>
-        </p:nvSpPr>
-        <p:spPr>
-          <a:xfrm>
-            <a:off x="8203997" y="1783080"/>
-            <a:ext cx="3484778" cy="685800"/>
-          </a:xfrm>
-          <a:prstGeom prst="rect">
-            <a:avLst/>
-          </a:prstGeom>
-          <a:noFill/>
-          <a:ln/>
-        </p:spPr>
-        <p:txBody>
-          <a:bodyPr wrap="square" lIns="0" tIns="0" rIns="0" bIns="0" rtlCol="0" anchor="ctr"/>
-          <a:lstStyle/>
-          <a:p>
-            <a:pPr algn="ctr" indent="0" marL="0">
-              <a:buNone/>
-            </a:pPr>
-            <a:r>
-              <a:rPr lang="en-US" sz="3400" b="1" dirty="0">
-                <a:solidFill>
-                  <a:srgbClr val="C77D14"/>
-                </a:solidFill>
-                <a:latin typeface="Cambria" pitchFamily="34" charset="0"/>
-                <a:ea typeface="Cambria" pitchFamily="34" charset="-122"/>
-                <a:cs typeface="Cambria" pitchFamily="34" charset="-120"/>
-              </a:rPr>
-              <a:t>100%</a:t>
-            </a:r>
-            <a:endParaRPr lang="en-US" sz="3400" dirty="0"/>
-          </a:p>
-        </p:txBody>
-      </p:sp>
-      <p:sp>
-        <p:nvSpPr>
-          <p:cNvPr id="12" name="Text 10"/>
-          <p:cNvSpPr txBox="1"/>
-          <p:nvPr/>
-        </p:nvSpPr>
-        <p:spPr>
-          <a:xfrm>
-            <a:off x="8432597" y="2487168"/>
-            <a:ext cx="3027578" cy="502920"/>
-          </a:xfrm>
-          <a:prstGeom prst="rect">
-            <a:avLst/>
-          </a:prstGeom>
-          <a:noFill/>
-          <a:ln/>
-        </p:spPr>
-        <p:txBody>
-          <a:bodyPr wrap="square" lIns="0" tIns="0" rIns="0" bIns="0" rtlCol="0" anchor="ctr"/>
-          <a:lstStyle/>
-          <a:p>
-            <a:pPr algn="ctr" indent="0" marL="0">
-              <a:buNone/>
-            </a:pPr>
-            <a:r>
-              <a:rPr lang="en-US" sz="1100" dirty="0">
-                <a:solidFill>
-                  <a:srgbClr val="1E2A3A"/>
-                </a:solidFill>
-                <a:latin typeface="Calibri" pitchFamily="34" charset="0"/>
-                <a:ea typeface="Calibri" pitchFamily="34" charset="-122"/>
-                <a:cs typeface="Calibri" pitchFamily="34" charset="-120"/>
-              </a:rPr>
-              <a:t>Of existing note data auto-migrated, zero loss</a:t>
-            </a:r>
-            <a:endParaRPr lang="en-US" sz="1100" dirty="0"/>
-          </a:p>
-        </p:txBody>
-      </p:sp>
-      <p:sp>
-        <p:nvSpPr>
-          <p:cNvPr id="13" name="Text 11"/>
-          <p:cNvSpPr txBox="1"/>
-          <p:nvPr/>
-        </p:nvSpPr>
-        <p:spPr>
-          <a:xfrm>
-            <a:off x="502920" y="3337560"/>
-            <a:ext cx="5486400" cy="320040"/>
-          </a:xfrm>
-          <a:prstGeom prst="rect">
-            <a:avLst/>
-          </a:prstGeom>
-          <a:noFill/>
-          <a:ln/>
-        </p:spPr>
-        <p:txBody>
-          <a:bodyPr wrap="square" lIns="0" tIns="0" rIns="0" bIns="0" rtlCol="0" anchor="ctr"/>
-          <a:lstStyle/>
-          <a:p>
-            <a:pPr indent="0" marL="0">
-              <a:buNone/>
-            </a:pPr>
-            <a:r>
-              <a:rPr lang="en-US" sz="1500" b="1" dirty="0">
-                <a:solidFill>
-                  <a:srgbClr val="0F172A"/>
-                </a:solidFill>
-                <a:latin typeface="Cambria" pitchFamily="34" charset="0"/>
-                <a:ea typeface="Cambria" pitchFamily="34" charset="-122"/>
-                <a:cs typeface="Cambria" pitchFamily="34" charset="-120"/>
-              </a:rPr>
-              <a:t>What shipped</a:t>
-            </a:r>
-            <a:endParaRPr lang="en-US" sz="1500" dirty="0"/>
-          </a:p>
-        </p:txBody>
-      </p:sp>
-      <p:pic>
-        <p:nvPicPr>
-          <p:cNvPr id="14" name="Image 0" descr="/tmp/claude-0/-home-claude/8aa44312-0fe2-5592-9e58-f7573fdf65a9/scratchpad/pptx_work/icons/check-green.png">    </p:cNvPr>
-          <p:cNvPicPr>
-            <a:picLocks noChangeAspect="1"/>
-          </p:cNvPicPr>
-          <p:nvPr/>
-        </p:nvPicPr>
-        <p:blipFill>
-          <a:blip r:embed="rId1"/>
-          <a:stretch>
-            <a:fillRect/>
-          </a:stretch>
-        </p:blipFill>
-        <p:spPr>
-          <a:xfrm>
-            <a:off x="502920" y="3794760"/>
-            <a:ext cx="201168" cy="201168"/>
-          </a:xfrm>
-          <a:prstGeom prst="rect">
-            <a:avLst/>
-          </a:prstGeom>
-        </p:spPr>
-      </p:pic>
-      <p:sp>
-        <p:nvSpPr>
-          <p:cNvPr id="15" name="Text 12"/>
-          <p:cNvSpPr txBox="1"/>
-          <p:nvPr/>
-        </p:nvSpPr>
-        <p:spPr>
-          <a:xfrm>
-            <a:off x="813816" y="3712464"/>
+          <p:cNvPr id="25" name="Text 17"/>
+          <p:cNvSpPr txBox="1"/>
+          <p:nvPr/>
+        </p:nvSpPr>
+        <p:spPr>
+          <a:xfrm>
+            <a:off x="6566764" y="5175504"/>
             <a:ext cx="5122012" cy="502920"/>
           </a:xfrm>
           <a:prstGeom prst="rect">
@@ -5318,1424 +4090,85 @@
                 <a:ea typeface="Calibri" pitchFamily="34" charset="-122"/>
                 <a:cs typeface="Calibri" pitchFamily="34" charset="-120"/>
               </a:rPr>
-              <a:t>Live token-by-token streaming for both AI features, fetch-based</a:t>
+              <a:t>All four Sprint 3 roadmap items delivered end-to-end</a:t>
             </a:r>
             <a:endParaRPr lang="en-US" sz="1150" dirty="0"/>
           </a:p>
         </p:txBody>
       </p:sp>
-      <p:pic>
-        <p:nvPicPr>
-          <p:cNvPr id="16" name="Image 1" descr="/tmp/claude-0/-home-claude/8aa44312-0fe2-5592-9e58-f7573fdf65a9/scratchpad/pptx_work/icons/check-green.png">    </p:cNvPr>
-          <p:cNvPicPr>
-            <a:picLocks noChangeAspect="1"/>
-          </p:cNvPicPr>
-          <p:nvPr/>
-        </p:nvPicPr>
-        <p:blipFill>
-          <a:blip r:embed="rId2"/>
-          <a:stretch>
-            <a:fillRect/>
-          </a:stretch>
-        </p:blipFill>
-        <p:spPr>
-          <a:xfrm>
-            <a:off x="6255868" y="3794760"/>
-            <a:ext cx="201168" cy="201168"/>
-          </a:xfrm>
-          <a:prstGeom prst="rect">
-            <a:avLst/>
-          </a:prstGeom>
-        </p:spPr>
-      </p:pic>
-      <p:sp>
-        <p:nvSpPr>
-          <p:cNvPr id="17" name="Text 13"/>
-          <p:cNvSpPr txBox="1"/>
-          <p:nvPr/>
-        </p:nvSpPr>
-        <p:spPr>
-          <a:xfrm>
-            <a:off x="6566764" y="3712464"/>
-            <a:ext cx="5122012" cy="502920"/>
-          </a:xfrm>
-          <a:prstGeom prst="rect">
-            <a:avLst/>
-          </a:prstGeom>
-          <a:noFill/>
-          <a:ln/>
-        </p:spPr>
-        <p:txBody>
-          <a:bodyPr wrap="square" lIns="0" tIns="0" rIns="0" bIns="0" rtlCol="0" anchor="t"/>
+      <p:sp>
+        <p:nvSpPr>
+          <p:cNvPr id="26" name="Text 18"/>
+          <p:cNvSpPr txBox="1"/>
+          <p:nvPr/>
+        </p:nvSpPr>
+        <p:spPr>
+          <a:xfrm>
+            <a:off x="502920" y="6473952"/>
+            <a:ext cx="4572000" cy="274320"/>
+          </a:xfrm>
+          <a:prstGeom prst="rect">
+            <a:avLst/>
+          </a:prstGeom>
+          <a:noFill/>
+          <a:ln/>
+        </p:spPr>
+        <p:txBody>
+          <a:bodyPr wrap="square" lIns="0" tIns="0" rIns="0" bIns="0" rtlCol="0" anchor="ctr"/>
           <a:lstStyle/>
           <a:p>
             <a:pPr indent="0" marL="0">
-              <a:lnSpc>
-                <a:spcPct val="105000"/>
-              </a:lnSpc>
-              <a:buNone/>
-            </a:pPr>
-            <a:r>
-              <a:rPr lang="en-US" sz="1150" dirty="0">
-                <a:solidFill>
-                  <a:srgbClr val="1E2A3A"/>
+              <a:buNone/>
+            </a:pPr>
+            <a:r>
+              <a:rPr lang="en-US" sz="900" dirty="0">
+                <a:solidFill>
+                  <a:srgbClr val="6B7280"/>
                 </a:solidFill>
                 <a:latin typeface="Calibri" pitchFamily="34" charset="0"/>
                 <a:ea typeface="Calibri" pitchFamily="34" charset="-122"/>
                 <a:cs typeface="Calibri" pitchFamily="34" charset="-120"/>
               </a:rPr>
-              <a:t>Structured, longer AI Summary format (up from a one-line blurb)</a:t>
-            </a:r>
-            <a:endParaRPr lang="en-US" sz="1150" dirty="0"/>
-          </a:p>
-        </p:txBody>
-      </p:sp>
-      <p:pic>
-        <p:nvPicPr>
-          <p:cNvPr id="18" name="Image 2" descr="/tmp/claude-0/-home-claude/8aa44312-0fe2-5592-9e58-f7573fdf65a9/scratchpad/pptx_work/icons/check-green.png">    </p:cNvPr>
-          <p:cNvPicPr>
-            <a:picLocks noChangeAspect="1"/>
-          </p:cNvPicPr>
-          <p:nvPr/>
-        </p:nvPicPr>
-        <p:blipFill>
-          <a:blip r:embed="rId3"/>
-          <a:stretch>
-            <a:fillRect/>
-          </a:stretch>
-        </p:blipFill>
-        <p:spPr>
-          <a:xfrm>
-            <a:off x="502920" y="4526280"/>
-            <a:ext cx="201168" cy="201168"/>
-          </a:xfrm>
-          <a:prstGeom prst="rect">
-            <a:avLst/>
-          </a:prstGeom>
-        </p:spPr>
-      </p:pic>
-      <p:sp>
-        <p:nvSpPr>
-          <p:cNvPr id="19" name="Text 14"/>
-          <p:cNvSpPr txBox="1"/>
-          <p:nvPr/>
-        </p:nvSpPr>
-        <p:spPr>
-          <a:xfrm>
-            <a:off x="813816" y="4443984"/>
-            <a:ext cx="5122012" cy="502920"/>
-          </a:xfrm>
-          <a:prstGeom prst="rect">
-            <a:avLst/>
-          </a:prstGeom>
-          <a:noFill/>
-          <a:ln/>
-        </p:spPr>
-        <p:txBody>
-          <a:bodyPr wrap="square" lIns="0" tIns="0" rIns="0" bIns="0" rtlCol="0" anchor="t"/>
-          <a:lstStyle/>
-          <a:p>
-            <a:pPr indent="0" marL="0">
-              <a:lnSpc>
-                <a:spcPct val="105000"/>
-              </a:lnSpc>
-              <a:buNone/>
-            </a:pPr>
-            <a:r>
-              <a:rPr lang="en-US" sz="1150" dirty="0">
-                <a:solidFill>
-                  <a:srgbClr val="1E2A3A"/>
+              <a:t>ResearchLens AI  ·  Sprint 3 Update</a:t>
+            </a:r>
+            <a:endParaRPr lang="en-US" sz="900" dirty="0"/>
+          </a:p>
+        </p:txBody>
+      </p:sp>
+      <p:sp>
+        <p:nvSpPr>
+          <p:cNvPr id="27" name="Text 19"/>
+          <p:cNvSpPr txBox="1"/>
+          <p:nvPr/>
+        </p:nvSpPr>
+        <p:spPr>
+          <a:xfrm>
+            <a:off x="10774375" y="6473952"/>
+            <a:ext cx="914400" cy="274320"/>
+          </a:xfrm>
+          <a:prstGeom prst="rect">
+            <a:avLst/>
+          </a:prstGeom>
+          <a:noFill/>
+          <a:ln/>
+        </p:spPr>
+        <p:txBody>
+          <a:bodyPr wrap="square" lIns="0" tIns="0" rIns="0" bIns="0" rtlCol="0" anchor="ctr"/>
+          <a:lstStyle/>
+          <a:p>
+            <a:pPr algn="r" indent="0" marL="0">
+              <a:buNone/>
+            </a:pPr>
+            <a:r>
+              <a:rPr lang="en-US" sz="900" dirty="0">
+                <a:solidFill>
+                  <a:srgbClr val="6B7280"/>
                 </a:solidFill>
                 <a:latin typeface="Calibri" pitchFamily="34" charset="0"/>
                 <a:ea typeface="Calibri" pitchFamily="34" charset="-122"/>
                 <a:cs typeface="Calibri" pitchFamily="34" charset="-120"/>
               </a:rPr>
-              <a:t>Relevance Analysis grounded in each project's own research question</a:t>
-            </a:r>
-            <a:endParaRPr lang="en-US" sz="1150" dirty="0"/>
-          </a:p>
-        </p:txBody>
-      </p:sp>
-      <p:pic>
-        <p:nvPicPr>
-          <p:cNvPr id="20" name="Image 3" descr="/tmp/claude-0/-home-claude/8aa44312-0fe2-5592-9e58-f7573fdf65a9/scratchpad/pptx_work/icons/check-green.png">    </p:cNvPr>
-          <p:cNvPicPr>
-            <a:picLocks noChangeAspect="1"/>
-          </p:cNvPicPr>
-          <p:nvPr/>
-        </p:nvPicPr>
-        <p:blipFill>
-          <a:blip r:embed="rId4"/>
-          <a:stretch>
-            <a:fillRect/>
-          </a:stretch>
-        </p:blipFill>
-        <p:spPr>
-          <a:xfrm>
-            <a:off x="6255868" y="4526280"/>
-            <a:ext cx="201168" cy="201168"/>
-          </a:xfrm>
-          <a:prstGeom prst="rect">
-            <a:avLst/>
-          </a:prstGeom>
-        </p:spPr>
-      </p:pic>
-      <p:sp>
-        <p:nvSpPr>
-          <p:cNvPr id="21" name="Text 15"/>
-          <p:cNvSpPr txBox="1"/>
-          <p:nvPr/>
-        </p:nvSpPr>
-        <p:spPr>
-          <a:xfrm>
-            <a:off x="6566764" y="4443984"/>
-            <a:ext cx="5122012" cy="502920"/>
-          </a:xfrm>
-          <a:prstGeom prst="rect">
-            <a:avLst/>
-          </a:prstGeom>
-          <a:noFill/>
-          <a:ln/>
-        </p:spPr>
-        <p:txBody>
-          <a:bodyPr wrap="square" lIns="0" tIns="0" rIns="0" bIns="0" rtlCol="0" anchor="t"/>
-          <a:lstStyle/>
-          <a:p>
-            <a:pPr indent="0" marL="0">
-              <a:lnSpc>
-                <a:spcPct val="105000"/>
-              </a:lnSpc>
-              <a:buNone/>
-            </a:pPr>
-            <a:r>
-              <a:rPr lang="en-US" sz="1150" dirty="0">
-                <a:solidFill>
-                  <a:srgbClr val="1E2A3A"/>
-                </a:solidFill>
-                <a:latin typeface="Calibri" pitchFamily="34" charset="0"/>
-                <a:ea typeface="Calibri" pitchFamily="34" charset="-122"/>
-                <a:cs typeface="Calibri" pitchFamily="34" charset="-120"/>
-              </a:rPr>
-              <a:t>New "AI Paper Analysis" hub page across every saved paper</a:t>
-            </a:r>
-            <a:endParaRPr lang="en-US" sz="1150" dirty="0"/>
-          </a:p>
-        </p:txBody>
-      </p:sp>
-      <p:pic>
-        <p:nvPicPr>
-          <p:cNvPr id="22" name="Image 4" descr="/tmp/claude-0/-home-claude/8aa44312-0fe2-5592-9e58-f7573fdf65a9/scratchpad/pptx_work/icons/check-green.png">    </p:cNvPr>
-          <p:cNvPicPr>
-            <a:picLocks noChangeAspect="1"/>
-          </p:cNvPicPr>
-          <p:nvPr/>
-        </p:nvPicPr>
-        <p:blipFill>
-          <a:blip r:embed="rId5"/>
-          <a:stretch>
-            <a:fillRect/>
-          </a:stretch>
-        </p:blipFill>
-        <p:spPr>
-          <a:xfrm>
-            <a:off x="502920" y="5257800"/>
-            <a:ext cx="201168" cy="201168"/>
-          </a:xfrm>
-          <a:prstGeom prst="rect">
-            <a:avLst/>
-          </a:prstGeom>
-        </p:spPr>
-      </p:pic>
-      <p:sp>
-        <p:nvSpPr>
-          <p:cNvPr id="23" name="Text 16"/>
-          <p:cNvSpPr txBox="1"/>
-          <p:nvPr/>
-        </p:nvSpPr>
-        <p:spPr>
-          <a:xfrm>
-            <a:off x="813816" y="5175504"/>
-            <a:ext cx="5122012" cy="502920"/>
-          </a:xfrm>
-          <a:prstGeom prst="rect">
-            <a:avLst/>
-          </a:prstGeom>
-          <a:noFill/>
-          <a:ln/>
-        </p:spPr>
-        <p:txBody>
-          <a:bodyPr wrap="square" lIns="0" tIns="0" rIns="0" bIns="0" rtlCol="0" anchor="t"/>
-          <a:lstStyle/>
-          <a:p>
-            <a:pPr indent="0" marL="0">
-              <a:lnSpc>
-                <a:spcPct val="105000"/>
-              </a:lnSpc>
-              <a:buNone/>
-            </a:pPr>
-            <a:r>
-              <a:rPr lang="en-US" sz="1150" dirty="0">
-                <a:solidFill>
-                  <a:srgbClr val="1E2A3A"/>
-                </a:solidFill>
-                <a:latin typeface="Calibri" pitchFamily="34" charset="0"/>
-                <a:ea typeface="Calibri" pitchFamily="34" charset="-122"/>
-                <a:cs typeface="Calibri" pitchFamily="34" charset="-120"/>
-              </a:rPr>
-              <a:t>Multi-note system: unlimited titled notes, add / edit / delete</a:t>
-            </a:r>
-            <a:endParaRPr lang="en-US" sz="1150" dirty="0"/>
-          </a:p>
-        </p:txBody>
-      </p:sp>
-      <p:pic>
-        <p:nvPicPr>
-          <p:cNvPr id="24" name="Image 5" descr="/tmp/claude-0/-home-claude/8aa44312-0fe2-5592-9e58-f7573fdf65a9/scratchpad/pptx_work/icons/check-green.png">    </p:cNvPr>
-          <p:cNvPicPr>
-            <a:picLocks noChangeAspect="1"/>
-          </p:cNvPicPr>
-          <p:nvPr/>
-        </p:nvPicPr>
-        <p:blipFill>
-          <a:blip r:embed="rId6"/>
-          <a:stretch>
-            <a:fillRect/>
-          </a:stretch>
-        </p:blipFill>
-        <p:spPr>
-          <a:xfrm>
-            <a:off x="6255868" y="5257800"/>
-            <a:ext cx="201168" cy="201168"/>
-          </a:xfrm>
-          <a:prstGeom prst="rect">
-            <a:avLst/>
-          </a:prstGeom>
-        </p:spPr>
-      </p:pic>
-      <p:sp>
-        <p:nvSpPr>
-          <p:cNvPr id="25" name="Text 17"/>
-          <p:cNvSpPr txBox="1"/>
-          <p:nvPr/>
-        </p:nvSpPr>
-        <p:spPr>
-          <a:xfrm>
-            <a:off x="6566764" y="5175504"/>
-            <a:ext cx="5122012" cy="502920"/>
-          </a:xfrm>
-          <a:prstGeom prst="rect">
-            <a:avLst/>
-          </a:prstGeom>
-          <a:noFill/>
-          <a:ln/>
-        </p:spPr>
-        <p:txBody>
-          <a:bodyPr wrap="square" lIns="0" tIns="0" rIns="0" bIns="0" rtlCol="0" anchor="t"/>
-          <a:lstStyle/>
-          <a:p>
-            <a:pPr indent="0" marL="0">
-              <a:lnSpc>
-                <a:spcPct val="105000"/>
-              </a:lnSpc>
-              <a:buNone/>
-            </a:pPr>
-            <a:r>
-              <a:rPr lang="en-US" sz="1150" dirty="0">
-                <a:solidFill>
-                  <a:srgbClr val="1E2A3A"/>
-                </a:solidFill>
-                <a:latin typeface="Calibri" pitchFamily="34" charset="0"/>
-                <a:ea typeface="Calibri" pitchFamily="34" charset="-122"/>
-                <a:cs typeface="Calibri" pitchFamily="34" charset="-120"/>
-              </a:rPr>
-              <a:t>Legacy single-note field migrated to the new system automatically</a:t>
-            </a:r>
-            <a:endParaRPr lang="en-US" sz="1150" dirty="0"/>
-          </a:p>
-        </p:txBody>
-      </p:sp>
-      <p:sp>
-        <p:nvSpPr>
-          <p:cNvPr id="26" name="Text 18"/>
-          <p:cNvSpPr txBox="1"/>
-          <p:nvPr/>
-        </p:nvSpPr>
-        <p:spPr>
-          <a:xfrm>
-            <a:off x="502920" y="6473952"/>
-            <a:ext cx="4572000" cy="274320"/>
-          </a:xfrm>
-          <a:prstGeom prst="rect">
-            <a:avLst/>
-          </a:prstGeom>
-          <a:noFill/>
-          <a:ln/>
-        </p:spPr>
-        <p:txBody>
-          <a:bodyPr wrap="square" lIns="0" tIns="0" rIns="0" bIns="0" rtlCol="0" anchor="ctr"/>
-          <a:lstStyle/>
-          <a:p>
-            <a:pPr indent="0" marL="0">
-              <a:buNone/>
-            </a:pPr>
-            <a:r>
-              <a:rPr lang="en-US" sz="900" dirty="0">
-                <a:solidFill>
-                  <a:srgbClr val="6B7280"/>
-                </a:solidFill>
-                <a:latin typeface="Calibri" pitchFamily="34" charset="0"/>
-                <a:ea typeface="Calibri" pitchFamily="34" charset="-122"/>
-                <a:cs typeface="Calibri" pitchFamily="34" charset="-120"/>
-              </a:rPr>
-              <a:t>ResearchLens AI  ·  Sprint 3 Update</a:t>
-            </a:r>
-            <a:endParaRPr lang="en-US" sz="900" dirty="0"/>
-          </a:p>
-        </p:txBody>
-      </p:sp>
-      <p:sp>
-        <p:nvSpPr>
-          <p:cNvPr id="27" name="Text 19"/>
-          <p:cNvSpPr txBox="1"/>
-          <p:nvPr/>
-        </p:nvSpPr>
-        <p:spPr>
-          <a:xfrm>
-            <a:off x="10774375" y="6473952"/>
-            <a:ext cx="914400" cy="274320"/>
-          </a:xfrm>
-          <a:prstGeom prst="rect">
-            <a:avLst/>
-          </a:prstGeom>
-          <a:noFill/>
-          <a:ln/>
-        </p:spPr>
-        <p:txBody>
-          <a:bodyPr wrap="square" lIns="0" tIns="0" rIns="0" bIns="0" rtlCol="0" anchor="ctr"/>
-          <a:lstStyle/>
-          <a:p>
-            <a:pPr algn="r" indent="0" marL="0">
-              <a:buNone/>
-            </a:pPr>
-            <a:r>
-              <a:rPr lang="en-US" sz="900" dirty="0">
-                <a:solidFill>
-                  <a:srgbClr val="6B7280"/>
-                </a:solidFill>
-                <a:latin typeface="Calibri" pitchFamily="34" charset="0"/>
-                <a:ea typeface="Calibri" pitchFamily="34" charset="-122"/>
-                <a:cs typeface="Calibri" pitchFamily="34" charset="-120"/>
-              </a:rPr>
-              <a:t>5 / 6</a:t>
-            </a:r>
-            <a:endParaRPr lang="en-US" sz="900" dirty="0"/>
-          </a:p>
-        </p:txBody>
-      </p:sp>
-    </p:spTree>
-  </p:cSld>
-  <p:clrMapOvr>
-    <a:masterClrMapping/>
-  </p:clrMapOvr>
-</p:sld>
-</file>
-
-<file path=ppt/slides/slide6.xml><?xml version="1.0" encoding="utf-8"?>
-<p:sld xmlns:a="http://schemas.openxmlformats.org/drawingml/2006/main" xmlns:r="http://schemas.openxmlformats.org/officeDocument/2006/relationships" xmlns:p="http://schemas.openxmlformats.org/presentationml/2006/main">
-  <p:cSld name="Slide 6">
-    <p:bg>
-      <p:bgPr>
-        <a:solidFill>
-          <a:srgbClr val="FFFFFF"/>
-        </a:solidFill>
-      </p:bgPr>
-    </p:bg>
-    <p:spTree>
-      <p:nvGrpSpPr>
-        <p:cNvPr id="1" name=""/>
-        <p:cNvGrpSpPr/>
-        <p:nvPr/>
-      </p:nvGrpSpPr>
-      <p:grpSpPr>
-        <a:xfrm>
-          <a:off x="0" y="0"/>
-          <a:ext cx="0" cy="0"/>
-          <a:chOff x="0" y="0"/>
-          <a:chExt cx="0" cy="0"/>
-        </a:xfrm>
-      </p:grpSpPr>
-      <p:sp>
-        <p:nvSpPr>
-          <p:cNvPr id="2" name="Text 0"/>
-          <p:cNvSpPr txBox="1"/>
-          <p:nvPr/>
-        </p:nvSpPr>
-        <p:spPr>
-          <a:xfrm>
-            <a:off x="502920" y="411480"/>
-            <a:ext cx="11185855" cy="548640"/>
-          </a:xfrm>
-          <a:prstGeom prst="rect">
-            <a:avLst/>
-          </a:prstGeom>
-          <a:noFill/>
-          <a:ln/>
-        </p:spPr>
-        <p:txBody>
-          <a:bodyPr wrap="square" lIns="0" tIns="0" rIns="0" bIns="0" rtlCol="0" anchor="ctr"/>
-          <a:lstStyle/>
-          <a:p>
-            <a:pPr indent="0" marL="0">
-              <a:buNone/>
-            </a:pPr>
-            <a:r>
-              <a:rPr lang="en-US" sz="3000" b="1" dirty="0">
-                <a:solidFill>
-                  <a:srgbClr val="0F172A"/>
-                </a:solidFill>
-                <a:latin typeface="Cambria" pitchFamily="34" charset="0"/>
-                <a:ea typeface="Cambria" pitchFamily="34" charset="-122"/>
-                <a:cs typeface="Cambria" pitchFamily="34" charset="-120"/>
-              </a:rPr>
-              <a:t>Sprint 3 Completed vs. Sprint 4 Focus</a:t>
-            </a:r>
-            <a:endParaRPr lang="en-US" sz="3000" dirty="0"/>
-          </a:p>
-        </p:txBody>
-      </p:sp>
-      <p:sp>
-        <p:nvSpPr>
-          <p:cNvPr id="3" name="Text 1"/>
-          <p:cNvSpPr txBox="1"/>
-          <p:nvPr/>
-        </p:nvSpPr>
-        <p:spPr>
-          <a:xfrm>
-            <a:off x="502920" y="932688"/>
-            <a:ext cx="11185855" cy="365760"/>
-          </a:xfrm>
-          <a:prstGeom prst="rect">
-            <a:avLst/>
-          </a:prstGeom>
-          <a:noFill/>
-          <a:ln/>
-        </p:spPr>
-        <p:txBody>
-          <a:bodyPr wrap="square" lIns="0" tIns="0" rIns="0" bIns="0" rtlCol="0" anchor="ctr"/>
-          <a:lstStyle/>
-          <a:p>
-            <a:pPr indent="0" marL="0">
-              <a:buNone/>
-            </a:pPr>
-            <a:r>
-              <a:rPr lang="en-US" sz="1350" dirty="0">
-                <a:solidFill>
-                  <a:srgbClr val="6B7280"/>
-                </a:solidFill>
-                <a:latin typeface="Calibri" pitchFamily="34" charset="0"/>
-                <a:ea typeface="Calibri" pitchFamily="34" charset="-122"/>
-                <a:cs typeface="Calibri" pitchFamily="34" charset="-120"/>
-              </a:rPr>
-              <a:t>Next up: agentic research intelligence, per the original project roadmap.</a:t>
-            </a:r>
-            <a:endParaRPr lang="en-US" sz="1350" dirty="0"/>
-          </a:p>
-        </p:txBody>
-      </p:sp>
-      <p:sp>
-        <p:nvSpPr>
-          <p:cNvPr id="4" name="Shape 2"/>
-          <p:cNvSpPr/>
-          <p:nvPr/>
-        </p:nvSpPr>
-        <p:spPr>
-          <a:xfrm>
-            <a:off x="502920" y="1645920"/>
-            <a:ext cx="5410048" cy="4434840"/>
-          </a:xfrm>
-          <a:prstGeom prst="roundRect">
-            <a:avLst>
-              <a:gd name="adj" fmla="val 1649"/>
-            </a:avLst>
-          </a:prstGeom>
-          <a:solidFill>
-            <a:srgbClr val="ECFDF5"/>
-          </a:solidFill>
-          <a:ln/>
-        </p:spPr>
-      </p:sp>
-      <p:sp>
-        <p:nvSpPr>
-          <p:cNvPr id="5" name="Text 3"/>
-          <p:cNvSpPr txBox="1"/>
-          <p:nvPr/>
-        </p:nvSpPr>
-        <p:spPr>
-          <a:xfrm>
-            <a:off x="777240" y="1828800"/>
-            <a:ext cx="4861408" cy="365760"/>
-          </a:xfrm>
-          <a:prstGeom prst="rect">
-            <a:avLst/>
-          </a:prstGeom>
-          <a:noFill/>
-          <a:ln/>
-        </p:spPr>
-        <p:txBody>
-          <a:bodyPr wrap="square" lIns="0" tIns="0" rIns="0" bIns="0" rtlCol="0" anchor="ctr"/>
-          <a:lstStyle/>
-          <a:p>
-            <a:pPr indent="0" marL="0">
-              <a:buNone/>
-            </a:pPr>
-            <a:r>
-              <a:rPr lang="en-US" sz="1600" b="1" dirty="0">
-                <a:solidFill>
-                  <a:srgbClr val="0F5132"/>
-                </a:solidFill>
-                <a:latin typeface="Cambria" pitchFamily="34" charset="0"/>
-                <a:ea typeface="Cambria" pitchFamily="34" charset="-122"/>
-                <a:cs typeface="Cambria" pitchFamily="34" charset="-120"/>
-              </a:rPr>
-              <a:t>Sprint 3 - Completed</a:t>
-            </a:r>
-            <a:endParaRPr lang="en-US" sz="1600" dirty="0"/>
-          </a:p>
-        </p:txBody>
-      </p:sp>
-      <p:pic>
-        <p:nvPicPr>
-          <p:cNvPr id="6" name="Image 0" descr="/tmp/claude-0/-home-claude/8aa44312-0fe2-5592-9e58-f7573fdf65a9/scratchpad/pptx_work/icons/check-green.png">    </p:cNvPr>
-          <p:cNvPicPr>
-            <a:picLocks noChangeAspect="1"/>
-          </p:cNvPicPr>
-          <p:nvPr/>
-        </p:nvPicPr>
-        <p:blipFill>
-          <a:blip r:embed="rId1"/>
-          <a:stretch>
-            <a:fillRect/>
-          </a:stretch>
-        </p:blipFill>
-        <p:spPr>
-          <a:xfrm>
-            <a:off x="777240" y="2377440"/>
-            <a:ext cx="182880" cy="182880"/>
-          </a:xfrm>
-          <a:prstGeom prst="rect">
-            <a:avLst/>
-          </a:prstGeom>
-        </p:spPr>
-      </p:pic>
-      <p:sp>
-        <p:nvSpPr>
-          <p:cNvPr id="7" name="Text 4"/>
-          <p:cNvSpPr txBox="1"/>
-          <p:nvPr/>
-        </p:nvSpPr>
-        <p:spPr>
-          <a:xfrm>
-            <a:off x="1051560" y="2286000"/>
-            <a:ext cx="4587088" cy="586740"/>
-          </a:xfrm>
-          <a:prstGeom prst="rect">
-            <a:avLst/>
-          </a:prstGeom>
-          <a:noFill/>
-          <a:ln/>
-        </p:spPr>
-        <p:txBody>
-          <a:bodyPr wrap="square" lIns="0" tIns="0" rIns="0" bIns="0" rtlCol="0" anchor="t"/>
-          <a:lstStyle/>
-          <a:p>
-            <a:pPr indent="0" marL="0">
-              <a:lnSpc>
-                <a:spcPct val="105000"/>
-              </a:lnSpc>
-              <a:buNone/>
-            </a:pPr>
-            <a:r>
-              <a:rPr lang="en-US" sz="1150" dirty="0">
-                <a:solidFill>
-                  <a:srgbClr val="1E2A3A"/>
-                </a:solidFill>
-                <a:latin typeface="Calibri" pitchFamily="34" charset="0"/>
-                <a:ea typeface="Calibri" pitchFamily="34" charset="-122"/>
-                <a:cs typeface="Calibri" pitchFamily="34" charset="-120"/>
-              </a:rPr>
-              <a:t>OpenAI integration via a dedicated service layer</a:t>
-            </a:r>
-            <a:endParaRPr lang="en-US" sz="1150" dirty="0"/>
-          </a:p>
-        </p:txBody>
-      </p:sp>
-      <p:pic>
-        <p:nvPicPr>
-          <p:cNvPr id="8" name="Image 1" descr="/tmp/claude-0/-home-claude/8aa44312-0fe2-5592-9e58-f7573fdf65a9/scratchpad/pptx_work/icons/check-green.png">    </p:cNvPr>
-          <p:cNvPicPr>
-            <a:picLocks noChangeAspect="1"/>
-          </p:cNvPicPr>
-          <p:nvPr/>
-        </p:nvPicPr>
-        <p:blipFill>
-          <a:blip r:embed="rId2"/>
-          <a:stretch>
-            <a:fillRect/>
-          </a:stretch>
-        </p:blipFill>
-        <p:spPr>
-          <a:xfrm>
-            <a:off x="777240" y="2964180"/>
-            <a:ext cx="182880" cy="182880"/>
-          </a:xfrm>
-          <a:prstGeom prst="rect">
-            <a:avLst/>
-          </a:prstGeom>
-        </p:spPr>
-      </p:pic>
-      <p:sp>
-        <p:nvSpPr>
-          <p:cNvPr id="9" name="Text 5"/>
-          <p:cNvSpPr txBox="1"/>
-          <p:nvPr/>
-        </p:nvSpPr>
-        <p:spPr>
-          <a:xfrm>
-            <a:off x="1051560" y="2872740"/>
-            <a:ext cx="4587088" cy="586740"/>
-          </a:xfrm>
-          <a:prstGeom prst="rect">
-            <a:avLst/>
-          </a:prstGeom>
-          <a:noFill/>
-          <a:ln/>
-        </p:spPr>
-        <p:txBody>
-          <a:bodyPr wrap="square" lIns="0" tIns="0" rIns="0" bIns="0" rtlCol="0" anchor="t"/>
-          <a:lstStyle/>
-          <a:p>
-            <a:pPr indent="0" marL="0">
-              <a:lnSpc>
-                <a:spcPct val="105000"/>
-              </a:lnSpc>
-              <a:buNone/>
-            </a:pPr>
-            <a:r>
-              <a:rPr lang="en-US" sz="1150" dirty="0">
-                <a:solidFill>
-                  <a:srgbClr val="1E2A3A"/>
-                </a:solidFill>
-                <a:latin typeface="Calibri" pitchFamily="34" charset="0"/>
-                <a:ea typeface="Calibri" pitchFamily="34" charset="-122"/>
-                <a:cs typeface="Calibri" pitchFamily="34" charset="-120"/>
-              </a:rPr>
-              <a:t>AI-generated paper summaries, streamed live</a:t>
-            </a:r>
-            <a:endParaRPr lang="en-US" sz="1150" dirty="0"/>
-          </a:p>
-        </p:txBody>
-      </p:sp>
-      <p:pic>
-        <p:nvPicPr>
-          <p:cNvPr id="10" name="Image 2" descr="/tmp/claude-0/-home-claude/8aa44312-0fe2-5592-9e58-f7573fdf65a9/scratchpad/pptx_work/icons/check-green.png">    </p:cNvPr>
-          <p:cNvPicPr>
-            <a:picLocks noChangeAspect="1"/>
-          </p:cNvPicPr>
-          <p:nvPr/>
-        </p:nvPicPr>
-        <p:blipFill>
-          <a:blip r:embed="rId3"/>
-          <a:stretch>
-            <a:fillRect/>
-          </a:stretch>
-        </p:blipFill>
-        <p:spPr>
-          <a:xfrm>
-            <a:off x="777240" y="3550920"/>
-            <a:ext cx="182880" cy="182880"/>
-          </a:xfrm>
-          <a:prstGeom prst="rect">
-            <a:avLst/>
-          </a:prstGeom>
-        </p:spPr>
-      </p:pic>
-      <p:sp>
-        <p:nvSpPr>
-          <p:cNvPr id="11" name="Text 6"/>
-          <p:cNvSpPr txBox="1"/>
-          <p:nvPr/>
-        </p:nvSpPr>
-        <p:spPr>
-          <a:xfrm>
-            <a:off x="1051560" y="3459480"/>
-            <a:ext cx="4587088" cy="586740"/>
-          </a:xfrm>
-          <a:prstGeom prst="rect">
-            <a:avLst/>
-          </a:prstGeom>
-          <a:noFill/>
-          <a:ln/>
-        </p:spPr>
-        <p:txBody>
-          <a:bodyPr wrap="square" lIns="0" tIns="0" rIns="0" bIns="0" rtlCol="0" anchor="t"/>
-          <a:lstStyle/>
-          <a:p>
-            <a:pPr indent="0" marL="0">
-              <a:lnSpc>
-                <a:spcPct val="105000"/>
-              </a:lnSpc>
-              <a:buNone/>
-            </a:pPr>
-            <a:r>
-              <a:rPr lang="en-US" sz="1150" dirty="0">
-                <a:solidFill>
-                  <a:srgbClr val="1E2A3A"/>
-                </a:solidFill>
-                <a:latin typeface="Calibri" pitchFamily="34" charset="0"/>
-                <a:ea typeface="Calibri" pitchFamily="34" charset="-122"/>
-                <a:cs typeface="Calibri" pitchFamily="34" charset="-120"/>
-              </a:rPr>
-              <a:t>Relevance analysis vs. each project's research question</a:t>
-            </a:r>
-            <a:endParaRPr lang="en-US" sz="1150" dirty="0"/>
-          </a:p>
-        </p:txBody>
-      </p:sp>
-      <p:pic>
-        <p:nvPicPr>
-          <p:cNvPr id="12" name="Image 3" descr="/tmp/claude-0/-home-claude/8aa44312-0fe2-5592-9e58-f7573fdf65a9/scratchpad/pptx_work/icons/check-green.png">    </p:cNvPr>
-          <p:cNvPicPr>
-            <a:picLocks noChangeAspect="1"/>
-          </p:cNvPicPr>
-          <p:nvPr/>
-        </p:nvPicPr>
-        <p:blipFill>
-          <a:blip r:embed="rId4"/>
-          <a:stretch>
-            <a:fillRect/>
-          </a:stretch>
-        </p:blipFill>
-        <p:spPr>
-          <a:xfrm>
-            <a:off x="777240" y="4137660"/>
-            <a:ext cx="182880" cy="182880"/>
-          </a:xfrm>
-          <a:prstGeom prst="rect">
-            <a:avLst/>
-          </a:prstGeom>
-        </p:spPr>
-      </p:pic>
-      <p:sp>
-        <p:nvSpPr>
-          <p:cNvPr id="13" name="Text 7"/>
-          <p:cNvSpPr txBox="1"/>
-          <p:nvPr/>
-        </p:nvSpPr>
-        <p:spPr>
-          <a:xfrm>
-            <a:off x="1051560" y="4046220"/>
-            <a:ext cx="4587088" cy="586740"/>
-          </a:xfrm>
-          <a:prstGeom prst="rect">
-            <a:avLst/>
-          </a:prstGeom>
-          <a:noFill/>
-          <a:ln/>
-        </p:spPr>
-        <p:txBody>
-          <a:bodyPr wrap="square" lIns="0" tIns="0" rIns="0" bIns="0" rtlCol="0" anchor="t"/>
-          <a:lstStyle/>
-          <a:p>
-            <a:pPr indent="0" marL="0">
-              <a:lnSpc>
-                <a:spcPct val="105000"/>
-              </a:lnSpc>
-              <a:buNone/>
-            </a:pPr>
-            <a:r>
-              <a:rPr lang="en-US" sz="1150" dirty="0">
-                <a:solidFill>
-                  <a:srgbClr val="1E2A3A"/>
-                </a:solidFill>
-                <a:latin typeface="Calibri" pitchFamily="34" charset="0"/>
-                <a:ea typeface="Calibri" pitchFamily="34" charset="-122"/>
-                <a:cs typeface="Calibri" pitchFamily="34" charset="-120"/>
-              </a:rPr>
-              <a:t>Per-paper detail page (abstract, summary, relevance, notes)</a:t>
-            </a:r>
-            <a:endParaRPr lang="en-US" sz="1150" dirty="0"/>
-          </a:p>
-        </p:txBody>
-      </p:sp>
-      <p:pic>
-        <p:nvPicPr>
-          <p:cNvPr id="14" name="Image 4" descr="/tmp/claude-0/-home-claude/8aa44312-0fe2-5592-9e58-f7573fdf65a9/scratchpad/pptx_work/icons/check-green.png">    </p:cNvPr>
-          <p:cNvPicPr>
-            <a:picLocks noChangeAspect="1"/>
-          </p:cNvPicPr>
-          <p:nvPr/>
-        </p:nvPicPr>
-        <p:blipFill>
-          <a:blip r:embed="rId5"/>
-          <a:stretch>
-            <a:fillRect/>
-          </a:stretch>
-        </p:blipFill>
-        <p:spPr>
-          <a:xfrm>
-            <a:off x="777240" y="4724400"/>
-            <a:ext cx="182880" cy="182880"/>
-          </a:xfrm>
-          <a:prstGeom prst="rect">
-            <a:avLst/>
-          </a:prstGeom>
-        </p:spPr>
-      </p:pic>
-      <p:sp>
-        <p:nvSpPr>
-          <p:cNvPr id="15" name="Text 8"/>
-          <p:cNvSpPr txBox="1"/>
-          <p:nvPr/>
-        </p:nvSpPr>
-        <p:spPr>
-          <a:xfrm>
-            <a:off x="1051560" y="4632960"/>
-            <a:ext cx="4587088" cy="586740"/>
-          </a:xfrm>
-          <a:prstGeom prst="rect">
-            <a:avLst/>
-          </a:prstGeom>
-          <a:noFill/>
-          <a:ln/>
-        </p:spPr>
-        <p:txBody>
-          <a:bodyPr wrap="square" lIns="0" tIns="0" rIns="0" bIns="0" rtlCol="0" anchor="t"/>
-          <a:lstStyle/>
-          <a:p>
-            <a:pPr indent="0" marL="0">
-              <a:lnSpc>
-                <a:spcPct val="105000"/>
-              </a:lnSpc>
-              <a:buNone/>
-            </a:pPr>
-            <a:r>
-              <a:rPr lang="en-US" sz="1150" dirty="0">
-                <a:solidFill>
-                  <a:srgbClr val="1E2A3A"/>
-                </a:solidFill>
-                <a:latin typeface="Calibri" pitchFamily="34" charset="0"/>
-                <a:ea typeface="Calibri" pitchFamily="34" charset="-122"/>
-                <a:cs typeface="Calibri" pitchFamily="34" charset="-120"/>
-              </a:rPr>
-              <a:t>"AI Paper Analysis" hub across all saved papers</a:t>
-            </a:r>
-            <a:endParaRPr lang="en-US" sz="1150" dirty="0"/>
-          </a:p>
-        </p:txBody>
-      </p:sp>
-      <p:pic>
-        <p:nvPicPr>
-          <p:cNvPr id="16" name="Image 5" descr="/tmp/claude-0/-home-claude/8aa44312-0fe2-5592-9e58-f7573fdf65a9/scratchpad/pptx_work/icons/check-green.png">    </p:cNvPr>
-          <p:cNvPicPr>
-            <a:picLocks noChangeAspect="1"/>
-          </p:cNvPicPr>
-          <p:nvPr/>
-        </p:nvPicPr>
-        <p:blipFill>
-          <a:blip r:embed="rId6"/>
-          <a:stretch>
-            <a:fillRect/>
-          </a:stretch>
-        </p:blipFill>
-        <p:spPr>
-          <a:xfrm>
-            <a:off x="777240" y="5311140"/>
-            <a:ext cx="182880" cy="182880"/>
-          </a:xfrm>
-          <a:prstGeom prst="rect">
-            <a:avLst/>
-          </a:prstGeom>
-        </p:spPr>
-      </p:pic>
-      <p:sp>
-        <p:nvSpPr>
-          <p:cNvPr id="17" name="Text 9"/>
-          <p:cNvSpPr txBox="1"/>
-          <p:nvPr/>
-        </p:nvSpPr>
-        <p:spPr>
-          <a:xfrm>
-            <a:off x="1051560" y="5219700"/>
-            <a:ext cx="4587088" cy="586740"/>
-          </a:xfrm>
-          <a:prstGeom prst="rect">
-            <a:avLst/>
-          </a:prstGeom>
-          <a:noFill/>
-          <a:ln/>
-        </p:spPr>
-        <p:txBody>
-          <a:bodyPr wrap="square" lIns="0" tIns="0" rIns="0" bIns="0" rtlCol="0" anchor="t"/>
-          <a:lstStyle/>
-          <a:p>
-            <a:pPr indent="0" marL="0">
-              <a:lnSpc>
-                <a:spcPct val="105000"/>
-              </a:lnSpc>
-              <a:buNone/>
-            </a:pPr>
-            <a:r>
-              <a:rPr lang="en-US" sz="1150" dirty="0">
-                <a:solidFill>
-                  <a:srgbClr val="1E2A3A"/>
-                </a:solidFill>
-                <a:latin typeface="Calibri" pitchFamily="34" charset="0"/>
-                <a:ea typeface="Calibri" pitchFamily="34" charset="-122"/>
-                <a:cs typeface="Calibri" pitchFamily="34" charset="-120"/>
-              </a:rPr>
-              <a:t>Multi-note system (add / edit / delete, unlimited per paper)</a:t>
-            </a:r>
-            <a:endParaRPr lang="en-US" sz="1150" dirty="0"/>
-          </a:p>
-        </p:txBody>
-      </p:sp>
-      <p:sp>
-        <p:nvSpPr>
-          <p:cNvPr id="18" name="Shape 10"/>
-          <p:cNvSpPr/>
-          <p:nvPr/>
-        </p:nvSpPr>
-        <p:spPr>
-          <a:xfrm>
-            <a:off x="6278728" y="1645920"/>
-            <a:ext cx="5410048" cy="4434840"/>
-          </a:xfrm>
-          <a:prstGeom prst="roundRect">
-            <a:avLst>
-              <a:gd name="adj" fmla="val 1649"/>
-            </a:avLst>
-          </a:prstGeom>
-          <a:solidFill>
-            <a:srgbClr val="EFF6FF"/>
-          </a:solidFill>
-          <a:ln/>
-        </p:spPr>
-      </p:sp>
-      <p:sp>
-        <p:nvSpPr>
-          <p:cNvPr id="19" name="Text 11"/>
-          <p:cNvSpPr txBox="1"/>
-          <p:nvPr/>
-        </p:nvSpPr>
-        <p:spPr>
-          <a:xfrm>
-            <a:off x="6553048" y="1828800"/>
-            <a:ext cx="4861408" cy="365760"/>
-          </a:xfrm>
-          <a:prstGeom prst="rect">
-            <a:avLst/>
-          </a:prstGeom>
-          <a:noFill/>
-          <a:ln/>
-        </p:spPr>
-        <p:txBody>
-          <a:bodyPr wrap="square" lIns="0" tIns="0" rIns="0" bIns="0" rtlCol="0" anchor="ctr"/>
-          <a:lstStyle/>
-          <a:p>
-            <a:pPr indent="0" marL="0">
-              <a:buNone/>
-            </a:pPr>
-            <a:r>
-              <a:rPr lang="en-US" sz="1600" b="1" dirty="0">
-                <a:solidFill>
-                  <a:srgbClr val="1E3A8A"/>
-                </a:solidFill>
-                <a:latin typeface="Cambria" pitchFamily="34" charset="0"/>
-                <a:ea typeface="Cambria" pitchFamily="34" charset="-122"/>
-                <a:cs typeface="Cambria" pitchFamily="34" charset="-120"/>
-              </a:rPr>
-              <a:t>Sprint 4 - Research Intelligence</a:t>
-            </a:r>
-            <a:endParaRPr lang="en-US" sz="1600" dirty="0"/>
-          </a:p>
-        </p:txBody>
-      </p:sp>
-      <p:sp>
-        <p:nvSpPr>
-          <p:cNvPr id="20" name="Text 12"/>
-          <p:cNvSpPr txBox="1"/>
-          <p:nvPr/>
-        </p:nvSpPr>
-        <p:spPr>
-          <a:xfrm>
-            <a:off x="6553048" y="2176272"/>
-            <a:ext cx="4861408" cy="274320"/>
-          </a:xfrm>
-          <a:prstGeom prst="rect">
-            <a:avLst/>
-          </a:prstGeom>
-          <a:noFill/>
-          <a:ln/>
-        </p:spPr>
-        <p:txBody>
-          <a:bodyPr wrap="square" lIns="0" tIns="0" rIns="0" bIns="0" rtlCol="0" anchor="ctr"/>
-          <a:lstStyle/>
-          <a:p>
-            <a:pPr indent="0" marL="0">
-              <a:buNone/>
-            </a:pPr>
-            <a:r>
-              <a:rPr lang="en-US" sz="1050" i="1" dirty="0">
-                <a:solidFill>
-                  <a:srgbClr val="6B7280"/>
-                </a:solidFill>
-                <a:latin typeface="Calibri" pitchFamily="34" charset="0"/>
-                <a:ea typeface="Calibri" pitchFamily="34" charset="-122"/>
-                <a:cs typeface="Calibri" pitchFamily="34" charset="-120"/>
-              </a:rPr>
-              <a:t>Agentic RAG, per the roadmap</a:t>
-            </a:r>
-            <a:endParaRPr lang="en-US" sz="1050" dirty="0"/>
-          </a:p>
-        </p:txBody>
-      </p:sp>
-      <p:pic>
-        <p:nvPicPr>
-          <p:cNvPr id="21" name="Image 6" descr="/tmp/claude-0/-home-claude/8aa44312-0fe2-5592-9e58-f7573fdf65a9/scratchpad/pptx_work/icons/arrowright-navy.png">    </p:cNvPr>
-          <p:cNvPicPr>
-            <a:picLocks noChangeAspect="1"/>
-          </p:cNvPicPr>
-          <p:nvPr/>
-        </p:nvPicPr>
-        <p:blipFill>
-          <a:blip r:embed="rId7"/>
-          <a:stretch>
-            <a:fillRect/>
-          </a:stretch>
-        </p:blipFill>
-        <p:spPr>
-          <a:xfrm>
-            <a:off x="6553048" y="2715768"/>
-            <a:ext cx="182880" cy="182880"/>
-          </a:xfrm>
-          <a:prstGeom prst="rect">
-            <a:avLst/>
-          </a:prstGeom>
-        </p:spPr>
-      </p:pic>
-      <p:sp>
-        <p:nvSpPr>
-          <p:cNvPr id="22" name="Text 13"/>
-          <p:cNvSpPr txBox="1"/>
-          <p:nvPr/>
-        </p:nvSpPr>
-        <p:spPr>
-          <a:xfrm>
-            <a:off x="6827368" y="2624328"/>
-            <a:ext cx="4587088" cy="800100"/>
-          </a:xfrm>
-          <a:prstGeom prst="rect">
-            <a:avLst/>
-          </a:prstGeom>
-          <a:noFill/>
-          <a:ln/>
-        </p:spPr>
-        <p:txBody>
-          <a:bodyPr wrap="square" lIns="0" tIns="0" rIns="0" bIns="0" rtlCol="0" anchor="t"/>
-          <a:lstStyle/>
-          <a:p>
-            <a:pPr indent="0" marL="0">
-              <a:lnSpc>
-                <a:spcPct val="105000"/>
-              </a:lnSpc>
-              <a:buNone/>
-            </a:pPr>
-            <a:r>
-              <a:rPr lang="en-US" sz="1150" dirty="0">
-                <a:solidFill>
-                  <a:srgbClr val="1E2A3A"/>
-                </a:solidFill>
-                <a:latin typeface="Calibri" pitchFamily="34" charset="0"/>
-                <a:ea typeface="Calibri" pitchFamily="34" charset="-122"/>
-                <a:cs typeface="Calibri" pitchFamily="34" charset="-120"/>
-              </a:rPr>
-              <a:t>Evidence tracking linking AI output to its source paper(s)</a:t>
-            </a:r>
-            <a:endParaRPr lang="en-US" sz="1150" dirty="0"/>
-          </a:p>
-        </p:txBody>
-      </p:sp>
-      <p:pic>
-        <p:nvPicPr>
-          <p:cNvPr id="23" name="Image 7" descr="/tmp/claude-0/-home-claude/8aa44312-0fe2-5592-9e58-f7573fdf65a9/scratchpad/pptx_work/icons/arrowright-navy.png">    </p:cNvPr>
-          <p:cNvPicPr>
-            <a:picLocks noChangeAspect="1"/>
-          </p:cNvPicPr>
-          <p:nvPr/>
-        </p:nvPicPr>
-        <p:blipFill>
-          <a:blip r:embed="rId8"/>
-          <a:stretch>
-            <a:fillRect/>
-          </a:stretch>
-        </p:blipFill>
-        <p:spPr>
-          <a:xfrm>
-            <a:off x="6553048" y="3515868"/>
-            <a:ext cx="182880" cy="182880"/>
-          </a:xfrm>
-          <a:prstGeom prst="rect">
-            <a:avLst/>
-          </a:prstGeom>
-        </p:spPr>
-      </p:pic>
-      <p:sp>
-        <p:nvSpPr>
-          <p:cNvPr id="24" name="Text 14"/>
-          <p:cNvSpPr txBox="1"/>
-          <p:nvPr/>
-        </p:nvSpPr>
-        <p:spPr>
-          <a:xfrm>
-            <a:off x="6827368" y="3424428"/>
-            <a:ext cx="4587088" cy="800100"/>
-          </a:xfrm>
-          <a:prstGeom prst="rect">
-            <a:avLst/>
-          </a:prstGeom>
-          <a:noFill/>
-          <a:ln/>
-        </p:spPr>
-        <p:txBody>
-          <a:bodyPr wrap="square" lIns="0" tIns="0" rIns="0" bIns="0" rtlCol="0" anchor="t"/>
-          <a:lstStyle/>
-          <a:p>
-            <a:pPr indent="0" marL="0">
-              <a:lnSpc>
-                <a:spcPct val="105000"/>
-              </a:lnSpc>
-              <a:buNone/>
-            </a:pPr>
-            <a:r>
-              <a:rPr lang="en-US" sz="1150" dirty="0">
-                <a:solidFill>
-                  <a:srgbClr val="1E2A3A"/>
-                </a:solidFill>
-                <a:latin typeface="Calibri" pitchFamily="34" charset="0"/>
-                <a:ea typeface="Calibri" pitchFamily="34" charset="-122"/>
-                <a:cs typeface="Calibri" pitchFamily="34" charset="-120"/>
-              </a:rPr>
-              <a:t>"Ask Your Literature" - Q&amp;A grounded in saved papers</a:t>
-            </a:r>
-            <a:endParaRPr lang="en-US" sz="1150" dirty="0"/>
-          </a:p>
-        </p:txBody>
-      </p:sp>
-      <p:pic>
-        <p:nvPicPr>
-          <p:cNvPr id="25" name="Image 8" descr="/tmp/claude-0/-home-claude/8aa44312-0fe2-5592-9e58-f7573fdf65a9/scratchpad/pptx_work/icons/arrowright-navy.png">    </p:cNvPr>
-          <p:cNvPicPr>
-            <a:picLocks noChangeAspect="1"/>
-          </p:cNvPicPr>
-          <p:nvPr/>
-        </p:nvPicPr>
-        <p:blipFill>
-          <a:blip r:embed="rId9"/>
-          <a:stretch>
-            <a:fillRect/>
-          </a:stretch>
-        </p:blipFill>
-        <p:spPr>
-          <a:xfrm>
-            <a:off x="6553048" y="4315968"/>
-            <a:ext cx="182880" cy="182880"/>
-          </a:xfrm>
-          <a:prstGeom prst="rect">
-            <a:avLst/>
-          </a:prstGeom>
-        </p:spPr>
-      </p:pic>
-      <p:sp>
-        <p:nvSpPr>
-          <p:cNvPr id="26" name="Text 15"/>
-          <p:cNvSpPr txBox="1"/>
-          <p:nvPr/>
-        </p:nvSpPr>
-        <p:spPr>
-          <a:xfrm>
-            <a:off x="6827368" y="4224528"/>
-            <a:ext cx="4587088" cy="800100"/>
-          </a:xfrm>
-          <a:prstGeom prst="rect">
-            <a:avLst/>
-          </a:prstGeom>
-          <a:noFill/>
-          <a:ln/>
-        </p:spPr>
-        <p:txBody>
-          <a:bodyPr wrap="square" lIns="0" tIns="0" rIns="0" bIns="0" rtlCol="0" anchor="t"/>
-          <a:lstStyle/>
-          <a:p>
-            <a:pPr indent="0" marL="0">
-              <a:lnSpc>
-                <a:spcPct val="105000"/>
-              </a:lnSpc>
-              <a:buNone/>
-            </a:pPr>
-            <a:r>
-              <a:rPr lang="en-US" sz="1150" dirty="0">
-                <a:solidFill>
-                  <a:srgbClr val="1E2A3A"/>
-                </a:solidFill>
-                <a:latin typeface="Calibri" pitchFamily="34" charset="0"/>
-                <a:ea typeface="Calibri" pitchFamily="34" charset="-122"/>
-                <a:cs typeface="Calibri" pitchFamily="34" charset="-120"/>
-              </a:rPr>
-              <a:t>Structured comparison across multiple saved papers</a:t>
-            </a:r>
-            <a:endParaRPr lang="en-US" sz="1150" dirty="0"/>
-          </a:p>
-        </p:txBody>
-      </p:sp>
-      <p:pic>
-        <p:nvPicPr>
-          <p:cNvPr id="27" name="Image 9" descr="/tmp/claude-0/-home-claude/8aa44312-0fe2-5592-9e58-f7573fdf65a9/scratchpad/pptx_work/icons/arrowright-navy.png">    </p:cNvPr>
-          <p:cNvPicPr>
-            <a:picLocks noChangeAspect="1"/>
-          </p:cNvPicPr>
-          <p:nvPr/>
-        </p:nvPicPr>
-        <p:blipFill>
-          <a:blip r:embed="rId10"/>
-          <a:stretch>
-            <a:fillRect/>
-          </a:stretch>
-        </p:blipFill>
-        <p:spPr>
-          <a:xfrm>
-            <a:off x="6553048" y="5116068"/>
-            <a:ext cx="182880" cy="182880"/>
-          </a:xfrm>
-          <a:prstGeom prst="rect">
-            <a:avLst/>
-          </a:prstGeom>
-        </p:spPr>
-      </p:pic>
-      <p:sp>
-        <p:nvSpPr>
-          <p:cNvPr id="28" name="Text 16"/>
-          <p:cNvSpPr txBox="1"/>
-          <p:nvPr/>
-        </p:nvSpPr>
-        <p:spPr>
-          <a:xfrm>
-            <a:off x="6827368" y="5024628"/>
-            <a:ext cx="4587088" cy="800100"/>
-          </a:xfrm>
-          <a:prstGeom prst="rect">
-            <a:avLst/>
-          </a:prstGeom>
-          <a:noFill/>
-          <a:ln/>
-        </p:spPr>
-        <p:txBody>
-          <a:bodyPr wrap="square" lIns="0" tIns="0" rIns="0" bIns="0" rtlCol="0" anchor="t"/>
-          <a:lstStyle/>
-          <a:p>
-            <a:pPr indent="0" marL="0">
-              <a:lnSpc>
-                <a:spcPct val="105000"/>
-              </a:lnSpc>
-              <a:buNone/>
-            </a:pPr>
-            <a:r>
-              <a:rPr lang="en-US" sz="1150" dirty="0">
-                <a:solidFill>
-                  <a:srgbClr val="1E2A3A"/>
-                </a:solidFill>
-                <a:latin typeface="Calibri" pitchFamily="34" charset="0"/>
-                <a:ea typeface="Calibri" pitchFamily="34" charset="-122"/>
-                <a:cs typeface="Calibri" pitchFamily="34" charset="-120"/>
-              </a:rPr>
-              <a:t>A minimal tool-using OpenAI Agent - the agentic-AI deliverable</a:t>
-            </a:r>
-            <a:endParaRPr lang="en-US" sz="1150" dirty="0"/>
-          </a:p>
-        </p:txBody>
-      </p:sp>
-      <p:sp>
-        <p:nvSpPr>
-          <p:cNvPr id="29" name="Text 17"/>
-          <p:cNvSpPr txBox="1"/>
-          <p:nvPr/>
-        </p:nvSpPr>
-        <p:spPr>
-          <a:xfrm>
-            <a:off x="502920" y="6473952"/>
-            <a:ext cx="4572000" cy="274320"/>
-          </a:xfrm>
-          <a:prstGeom prst="rect">
-            <a:avLst/>
-          </a:prstGeom>
-          <a:noFill/>
-          <a:ln/>
-        </p:spPr>
-        <p:txBody>
-          <a:bodyPr wrap="square" lIns="0" tIns="0" rIns="0" bIns="0" rtlCol="0" anchor="ctr"/>
-          <a:lstStyle/>
-          <a:p>
-            <a:pPr indent="0" marL="0">
-              <a:buNone/>
-            </a:pPr>
-            <a:r>
-              <a:rPr lang="en-US" sz="900" dirty="0">
-                <a:solidFill>
-                  <a:srgbClr val="6B7280"/>
-                </a:solidFill>
-                <a:latin typeface="Calibri" pitchFamily="34" charset="0"/>
-                <a:ea typeface="Calibri" pitchFamily="34" charset="-122"/>
-                <a:cs typeface="Calibri" pitchFamily="34" charset="-120"/>
-              </a:rPr>
-              <a:t>ResearchLens AI  ·  Sprint 3 Update</a:t>
-            </a:r>
-            <a:endParaRPr lang="en-US" sz="900" dirty="0"/>
-          </a:p>
-        </p:txBody>
-      </p:sp>
-      <p:sp>
-        <p:nvSpPr>
-          <p:cNvPr id="30" name="Text 18"/>
-          <p:cNvSpPr txBox="1"/>
-          <p:nvPr/>
-        </p:nvSpPr>
-        <p:spPr>
-          <a:xfrm>
-            <a:off x="10774375" y="6473952"/>
-            <a:ext cx="914400" cy="274320"/>
-          </a:xfrm>
-          <a:prstGeom prst="rect">
-            <a:avLst/>
-          </a:prstGeom>
-          <a:noFill/>
-          <a:ln/>
-        </p:spPr>
-        <p:txBody>
-          <a:bodyPr wrap="square" lIns="0" tIns="0" rIns="0" bIns="0" rtlCol="0" anchor="ctr"/>
-          <a:lstStyle/>
-          <a:p>
-            <a:pPr algn="r" indent="0" marL="0">
-              <a:buNone/>
-            </a:pPr>
-            <a:r>
-              <a:rPr lang="en-US" sz="900" dirty="0">
-                <a:solidFill>
-                  <a:srgbClr val="6B7280"/>
-                </a:solidFill>
-                <a:latin typeface="Calibri" pitchFamily="34" charset="0"/>
-                <a:ea typeface="Calibri" pitchFamily="34" charset="-122"/>
-                <a:cs typeface="Calibri" pitchFamily="34" charset="-120"/>
-              </a:rPr>
-              <a:t>6 / 6</a:t>
+              <a:t>4 / 4</a:t>
             </a:r>
             <a:endParaRPr lang="en-US" sz="900" dirty="0"/>
           </a:p>
